--- a/03-ai-agents/09-agents-in-production/artifacts/presentation_final.pptx
+++ b/03-ai-agents/09-agents-in-production/artifacts/presentation_final.pptx
@@ -6,7 +6,7 @@
   </p:sldMasterIdLst>
   <p:sldIdLst>
     <p:sldId id="256" r:id="rId7"/>
-    <p:sldId id="257" r:id="rId9"/>
+    <p:sldId id="257" r:id="rId8"/>
     <p:sldId id="258" r:id="rId10"/>
     <p:sldId id="259" r:id="rId11"/>
     <p:sldId id="260" r:id="rId12"/>
@@ -515,34 +515,33 @@
           <a:lstStyle/>
           <a:p>
             <a:r>
-              <a:t>Objetivo: Abrir com um gancho comercial conectando engenharia aplicada à Jornada de Dados.</a:t>
+              <a:t>Bullets:</a:t>
+            </a:r>
+          </a:p>
+          <a:p>
+            <a:r>
+              <a:t>  • AI Engineer no TCEMG: desenvolvimento de sistemas full-stack de IA com assistentes virtuais, RAG, agentes e fluxos agenticos para automação e aumento de produtividade no setor público.</a:t>
+            </a:r>
+          </a:p>
+          <a:p>
+            <a:r>
+              <a:t>  • Implementação de pesquisa inteligente de jurisprudência/leis/normas com consultas semânticas usando LLMs, reduzindo drasticamente tempo de busca e análise.</a:t>
+            </a:r>
+          </a:p>
+          <a:p>
+            <a:r>
+              <a:t>  • Data Engineer na Quality Engineering: API de catálogo de dados com pipelines escaláveis e criação de arquitetura RAG em Python para onboarding com banco vetorial e embeddings.</a:t>
+            </a:r>
+          </a:p>
+          <a:p>
+            <a:r>
+              <a:t>  • Monitor Técnico &amp; Instrutor de AI &amp; Data Engineering na Jornada de Dados: ministra workshops/bootcamps e faz mentoria prática em RAG, bancos vetoriais, busca semântica e automação com IA.</a:t>
             </a:r>
           </a:p>
           <a:p/>
           <a:p>
             <a:r>
-              <a:t>Bullets:</a:t>
-            </a:r>
-          </a:p>
-          <a:p>
-            <a:r>
-              <a:t>  • Sistemas de IA, RAG e agentes em produção</a:t>
-            </a:r>
-          </a:p>
-          <a:p>
-            <a:r>
-              <a:t>  • Arquitetura, orquestração, observabilidade e deploy</a:t>
-            </a:r>
-          </a:p>
-          <a:p>
-            <a:r>
-              <a:t>  • De desenvolvedor → AI Engineer</a:t>
-            </a:r>
-          </a:p>
-          <a:p/>
-          <a:p>
-            <a:r>
-              <a:t>Mensagem principal: Uma formação prática para transformar modelos em produtos confiáveis.</a:t>
+              <a:t>Mensagem principal: Eu ensino este curso para ajudar você a projetar e implementar soluções de IA aplicadas ao mundo real — com fundamentos sólidos de engenharia de dados e práticas modernas em LLMs, RAG e agentes. A ideia é que você saia com autonomia para construir sistemas úteis, escaláveis e com foco em valor de negócio.</a:t>
             </a:r>
           </a:p>
         </p:txBody>
@@ -612,39 +611,42 @@
           <a:lstStyle/>
           <a:p>
             <a:r>
-              <a:t>Objetivo: Mostrar por que OCR e inferência local/produção exigem engenharia real de pipeline e performance.</a:t>
-            </a:r>
-          </a:p>
-          <a:p/>
-          <a:p>
-            <a:r>
               <a:t>Bullets:</a:t>
             </a:r>
           </a:p>
           <a:p>
             <a:r>
-              <a:t>  • Rodar modelos eficiente, barata e confiavelmente</a:t>
-            </a:r>
-          </a:p>
-          <a:p>
-            <a:r>
-              <a:t>  • Onde engenharia de software encontra “metal”</a:t>
-            </a:r>
-          </a:p>
-          <a:p>
-            <a:r>
-              <a:t>  • OCR moderno: layout/tabelas/estrutura, não só texto</a:t>
-            </a:r>
-          </a:p>
-          <a:p>
-            <a:r>
-              <a:t>  • Performance: GPU (VRAM), throughput e unit economics</a:t>
-            </a:r>
-          </a:p>
-          <a:p/>
-          <a:p>
-            <a:r>
-              <a:t>Mensagem principal: Pipeline &gt; modelo: você constrói sistemas que funcionam sob carga.</a:t>
+              <a:t>  • Módulo 1: OCR Fundamentals — layout, desafios e métricas (CER/WER)</a:t>
+            </a:r>
+          </a:p>
+          <a:p>
+            <a:r>
+              <a:t>  • Módulo 2: OCR Pipelines — Tesseract vs Azure DI vs Vision LLMs, arquitetura e tradeoffs</a:t>
+            </a:r>
+          </a:p>
+          <a:p>
+            <a:r>
+              <a:t>  • Módulo 3: Document Intelligence — end-to-end, filas (SQS), idempotência, monitoramento</a:t>
+            </a:r>
+          </a:p>
+          <a:p>
+            <a:r>
+              <a:t>  • Módulo 4: Hugging Face — safetensors/tokenizers/transformers e formatos (FP16/INT8/ GGUF/AWQ)</a:t>
+            </a:r>
+          </a:p>
+          <a:p>
+            <a:r>
+              <a:t>  • Módulo 5: Ollama — prototipagem local, limites e workflow para staging</a:t>
+            </a:r>
+          </a:p>
+          <a:p>
+            <a:r>
+              <a:t>  • Módulo 6: vLLM — continuous batching, paged attention e serving via OpenAI API</a:t>
+            </a:r>
+          </a:p>
+          <a:p>
+            <a:r>
+              <a:t>  • Módulo 7: Hardware &amp; Performance — VRAM is king, unit economics e quantização</a:t>
             </a:r>
           </a:p>
         </p:txBody>
@@ -714,7 +716,7 @@
           <a:lstStyle/>
           <a:p>
             <a:r>
-              <a:t>Objetivo: Consolidar competências em OCR/document intelligence e inferência em produção.</a:t>
+              <a:t>Objetivo: Aprender quando treinar (e quando não treinar), preparar datasets corretamente e fazer deploy com foco em riscos e governança.</a:t>
             </a:r>
           </a:p>
           <a:p/>
@@ -725,43 +727,33 @@
           </a:p>
           <a:p>
             <a:r>
-              <a:t>  • OCR Fundamentals: layout, ruído, métricas (CER/WER) e limitações</a:t>
-            </a:r>
-          </a:p>
-          <a:p>
-            <a:r>
-              <a:t>  • OCR Pipelines: pré/pós-processamento, chunking e tradeoffs custo/qualidade/velocidade</a:t>
-            </a:r>
-          </a:p>
-          <a:p>
-            <a:r>
-              <a:t>  • Document Intelligence: fila, idempotência, retries e monitoramento de falhas</a:t>
-            </a:r>
-          </a:p>
-          <a:p>
-            <a:r>
-              <a:t>  • Hugging Face na prática: formatos/quantização (FP16/INT8/GGUF/AWQ) e Transformers/tokenizers</a:t>
-            </a:r>
-          </a:p>
-          <a:p>
-            <a:r>
-              <a:t>  • Ollama para prototipar e workflow local→staging</a:t>
-            </a:r>
-          </a:p>
-          <a:p>
-            <a:r>
-              <a:t>  • vLLM: continuous batching/paged attention e serving via OpenAI-compatible API</a:t>
-            </a:r>
-          </a:p>
-          <a:p>
-            <a:r>
-              <a:t>  • Hardware &amp; Performance: VRAM, quantização e economia de tokens</a:t>
+              <a:t>  • Decidir entre Fine-Tuning vs RAG vs prompting com uma matriz prática</a:t>
+            </a:r>
+          </a:p>
+          <a:p>
+            <a:r>
+              <a:t>  • Entender tipos de adaptação (LoRA/QLoRA, PEFT e full fine-tuning) e tradeoffs</a:t>
+            </a:r>
+          </a:p>
+          <a:p>
+            <a:r>
+              <a:t>  • Montar dataset com qualidade e formato de instruction datasets</a:t>
+            </a:r>
+          </a:p>
+          <a:p>
+            <a:r>
+              <a:t>  • Fazer workflow real com Unsloth (treino e geração de adapters/formatos)</a:t>
+            </a:r>
+          </a:p>
+          <a:p>
+            <a:r>
+              <a:t>  • Preparar deploy e operação: adapters, merge, manutenção, riscos e conformidade</a:t>
             </a:r>
           </a:p>
           <a:p/>
           <a:p>
             <a:r>
-              <a:t>Mensagem principal: Você transforma OCR e VLMs em produtos com custo e latência previsíveis.</a:t>
+              <a:t>Mensagem principal: Depois de saber como conectar dados (RAG), orquestrar ações (agentes) e operar com eficiência (infra/OCR), o fine-tuning entra como especialização — só quando faz sentido.</a:t>
             </a:r>
           </a:p>
         </p:txBody>
@@ -831,39 +823,32 @@
           <a:lstStyle/>
           <a:p>
             <a:r>
-              <a:t>Objetivo: Introduzir quando treinar e como evitar over-engineering (RAG/prompting vs fine-tuning).</a:t>
-            </a:r>
-          </a:p>
-          <a:p/>
-          <a:p>
-            <a:r>
               <a:t>Bullets:</a:t>
             </a:r>
           </a:p>
           <a:p>
             <a:r>
-              <a:t>  • Objetivo: saber quando treinar — e principalmente quando NÃO treinar</a:t>
-            </a:r>
-          </a:p>
-          <a:p>
-            <a:r>
-              <a:t>  • Especialização como “última milha”</a:t>
-            </a:r>
-          </a:p>
-          <a:p>
-            <a:r>
-              <a:t>  • Técnicas: LoRA/QLoRA e preparação de datasets</a:t>
-            </a:r>
-          </a:p>
-          <a:p>
-            <a:r>
-              <a:t>  • Deploy, riscos e governança</a:t>
-            </a:r>
-          </a:p>
-          <a:p/>
-          <a:p>
-            <a:r>
-              <a:t>Mensagem principal: Fine-tuning é decisão de engenharia: qualidade, custo e manutenção.</a:t>
+              <a:t>  • Módulo 1: Fundamentos de Fine-Tuning — adaptação de pesos vs injeção, matriz de decisão e tipos</a:t>
+            </a:r>
+          </a:p>
+          <a:p>
+            <a:r>
+              <a:t>  • Módulo 2: Unsloth — workflow eficiente e geração de LoRA/GGUF</a:t>
+            </a:r>
+          </a:p>
+          <a:p>
+            <a:r>
+              <a:t>  • Módulo 3: Meu Primeiro LLM — dataset, preparação, treino e avaliação (baselines e LLM-as-a-Judge)</a:t>
+            </a:r>
+          </a:p>
+          <a:p>
+            <a:r>
+              <a:t>  • Módulo 4: Deploy do Modelo — adapters, merge e carregamento no runtime</a:t>
+            </a:r>
+          </a:p>
+          <a:p>
+            <a:r>
+              <a:t>  • Módulo 5: Fine-Tuning em Produção — ops, riscos (catastrophic forgetting), compliance e governança</a:t>
             </a:r>
           </a:p>
         </p:txBody>
@@ -933,161 +918,33 @@
           <a:lstStyle/>
           <a:p>
             <a:r>
-              <a:t>Objetivo: Resumir o ciclo end-to-end de fine-tuning e como avaliar antes de deploy.</a:t>
+              <a:t>Bullets:</a:t>
+            </a:r>
+          </a:p>
+          <a:p>
+            <a:r>
+              <a:t>  • Comece pelo Bloco 1 (Fundamentos) para consolidar base técnica e mentalidade de produção</a:t>
+            </a:r>
+          </a:p>
+          <a:p>
+            <a:r>
+              <a:t>  • Em seguida, avance para RAG (Bloco 2) para conectar LLMs a dados reais com avaliação e segurança</a:t>
+            </a:r>
+          </a:p>
+          <a:p>
+            <a:r>
+              <a:t>  • Depois, passe para Agentes (Bloco 3) para orquestrar decisões e ações com guardrails</a:t>
+            </a:r>
+          </a:p>
+          <a:p>
+            <a:r>
+              <a:t>  • Por fim, aprofunde em OCR/Infra (Bloco 4) e especialização (Bloco 5) para casos de maior exigência</a:t>
             </a:r>
           </a:p>
           <a:p/>
           <a:p>
             <a:r>
-              <a:t>Bullets:</a:t>
-            </a:r>
-          </a:p>
-          <a:p>
-            <a:r>
-              <a:t>  • Fine-tuning vs RAG/prompting: matriz de decisão</a:t>
-            </a:r>
-          </a:p>
-          <a:p>
-            <a:r>
-              <a:t>  • Tipos de adaptação: PEFT, LoRA, QLoRA e full fine-tuning</a:t>
-            </a:r>
-          </a:p>
-          <a:p>
-            <a:r>
-              <a:t>  • Unsloth: workflow eficiente (notebook→GGUF/adapter)</a:t>
-            </a:r>
-          </a:p>
-          <a:p>
-            <a:r>
-              <a:t>  • Dataset engineering: instruction datasets + formatação</a:t>
-            </a:r>
-          </a:p>
-          <a:p>
-            <a:r>
-              <a:t>  • Avaliação: baselines e LLM-as-a-Judge (ex.: GPT-4 como juiz)</a:t>
-            </a:r>
-          </a:p>
-          <a:p>
-            <a:r>
-              <a:t>  • Deploy: adapters no vLLM, merge (quando e por quê)</a:t>
-            </a:r>
-          </a:p>
-          <a:p>
-            <a:r>
-              <a:t>  • Produção: ops/custos, riscos (catastrophic forgetting) e compliance</a:t>
-            </a:r>
-          </a:p>
-          <a:p/>
-          <a:p>
-            <a:r>
-              <a:t>Mensagem principal: Você aprende a projetar especialização com métricas, avaliação e governança.</a:t>
-            </a:r>
-          </a:p>
-        </p:txBody>
-      </p:sp>
-      <p:sp>
-        <p:nvSpPr>
-          <p:cNvPr id="4" name="Slide Number Placeholder 3"/>
-          <p:cNvSpPr>
-            <a:spLocks noGrp="1"/>
-          </p:cNvSpPr>
-          <p:nvPr>
-            <p:ph type="sldNum" idx="5" sz="quarter"/>
-          </p:nvPr>
-        </p:nvSpPr>
-        <p:spPr/>
-      </p:sp>
-    </p:spTree>
-  </p:cSld>
-  <p:clrMapOvr>
-    <a:masterClrMapping/>
-  </p:clrMapOvr>
-</p:notes>
-</file>
-
-<file path=ppt/notesSlides/notesSlide14.xml><?xml version="1.0" encoding="utf-8"?>
-<p:notes xmlns:a="http://schemas.openxmlformats.org/drawingml/2006/main" xmlns:p="http://schemas.openxmlformats.org/presentationml/2006/main" xmlns:r="http://schemas.openxmlformats.org/officeDocument/2006/relationships">
-  <p:cSld>
-    <p:spTree>
-      <p:nvGrpSpPr>
-        <p:cNvPr id="1" name=""/>
-        <p:cNvGrpSpPr/>
-        <p:nvPr/>
-      </p:nvGrpSpPr>
-      <p:grpSpPr>
-        <a:xfrm>
-          <a:off x="0" y="0"/>
-          <a:ext cx="0" cy="0"/>
-          <a:chOff x="0" y="0"/>
-          <a:chExt cx="0" cy="0"/>
-        </a:xfrm>
-      </p:grpSpPr>
-      <p:sp>
-        <p:nvSpPr>
-          <p:cNvPr id="2" name="Slide Image Placeholder 1"/>
-          <p:cNvSpPr>
-            <a:spLocks noGrp="1"/>
-          </p:cNvSpPr>
-          <p:nvPr>
-            <p:ph type="sldImg" idx="2"/>
-          </p:nvPr>
-        </p:nvSpPr>
-        <p:spPr/>
-      </p:sp>
-      <p:sp>
-        <p:nvSpPr>
-          <p:cNvPr id="3" name="Notes Placeholder 2"/>
-          <p:cNvSpPr>
-            <a:spLocks noGrp="1"/>
-          </p:cNvSpPr>
-          <p:nvPr>
-            <p:ph type="body" idx="3" sz="quarter"/>
-          </p:nvPr>
-        </p:nvSpPr>
-        <p:spPr/>
-        <p:txBody>
-          <a:bodyPr/>
-          <a:lstStyle/>
-          <a:p>
-            <a:r>
-              <a:t>Objetivo: Consolidar como os blocos se conectam para construir soluções de IA em produção.</a:t>
-            </a:r>
-          </a:p>
-          <a:p/>
-          <a:p>
-            <a:r>
-              <a:t>Bullets:</a:t>
-            </a:r>
-          </a:p>
-          <a:p>
-            <a:r>
-              <a:t>  • Fundamentos: contratos, APIs e dados (confiabilidade base)</a:t>
-            </a:r>
-          </a:p>
-          <a:p>
-            <a:r>
-              <a:t>  • RAG: pipeline completo + avaliação/observabilidade</a:t>
-            </a:r>
-          </a:p>
-          <a:p>
-            <a:r>
-              <a:t>  • Agentes: orquestração, memória, ferramentas e guardrails</a:t>
-            </a:r>
-          </a:p>
-          <a:p>
-            <a:r>
-              <a:t>  • OCR/Infra: performance, filas, serving e unit economics</a:t>
-            </a:r>
-          </a:p>
-          <a:p>
-            <a:r>
-              <a:t>  • Fine-tuning: decisão, adaptação eficiente e governança</a:t>
-            </a:r>
-          </a:p>
-          <a:p/>
-          <a:p>
-            <a:r>
-              <a:t>Mensagem principal: Você termina capaz de projetar e operar sistemas de IA completos.</a:t>
+              <a:t>Mensagem principal: Você vai sair com autonomia para projetar e colocar em produção soluções de IA úteis, escaláveis e mensuráveis.</a:t>
             </a:r>
           </a:p>
         </p:txBody>
@@ -1157,7 +1014,7 @@
           <a:lstStyle/>
           <a:p>
             <a:r>
-              <a:t>Objetivo: Contextualizar a trajetória e o foco em confiabilidade, avaliação e produção.</a:t>
+              <a:t>Objetivo: Sair com uma trilha completa e prática para transformar LLMs em produtos de IA úteis, escaláveis e mensuráveis.</a:t>
             </a:r>
           </a:p>
           <a:p/>
@@ -1168,28 +1025,32 @@
           </a:p>
           <a:p>
             <a:r>
-              <a:t>  • Você vai construir sistemas de IA que funcionam no mundo real</a:t>
-            </a:r>
-          </a:p>
-          <a:p>
-            <a:r>
-              <a:t>  • Structured outputs + guardrails para reduzir fragilidade</a:t>
-            </a:r>
-          </a:p>
-          <a:p>
-            <a:r>
-              <a:t>  • RAG com avaliação/observabilidade para manter qualidade contínua</a:t>
-            </a:r>
-          </a:p>
-          <a:p>
-            <a:r>
-              <a:t>  • Agentes orquestrados com memória, ferramentas e human-in-the-loop</a:t>
-            </a:r>
-          </a:p>
-          <a:p/>
-          <a:p>
-            <a:r>
-              <a:t>Mensagem principal: Eu trago uma mentalidade de engenharia: qualidade, custo e governança.</a:t>
+              <a:t>  • Projetar, integrar e operar soluções baseadas em Modelos de Fundação (LLMs) com foco em produção</a:t>
+            </a:r>
+          </a:p>
+          <a:p>
+            <a:r>
+              <a:t>  • Aplicar fundamentos de LLMs + contratos estruturados de dados + arquitetura Python para sistemas escaláveis</a:t>
+            </a:r>
+          </a:p>
+          <a:p>
+            <a:r>
+              <a:t>  • Construir Sistemas RAG: ingestão, embeddings, retrieval (híbrido), avaliação e segurança</a:t>
+            </a:r>
+          </a:p>
+          <a:p>
+            <a:r>
+              <a:t>  • Orquestrar Agentes de IA com tool calling e grafos de estado (LangGraph), incluindo memória e human-in-the-loop</a:t>
+            </a:r>
+          </a:p>
+          <a:p>
+            <a:r>
+              <a:t>  • Rodar OCR e Document Intelligence com inferência local/produção e otimização de hardware (vLLM/Ollama)</a:t>
+            </a:r>
+          </a:p>
+          <a:p>
+            <a:r>
+              <a:t>  • Decidir quando fine-tuning é necessário, preparar datasets e fazer deploy com governança</a:t>
             </a:r>
           </a:p>
         </p:txBody>
@@ -1259,7 +1120,7 @@
           <a:lstStyle/>
           <a:p>
             <a:r>
-              <a:t>Objetivo: Definir o papel do AI Engineer e explicar como a trilha reduz o hype e foca em produção.</a:t>
+              <a:t>Objetivo: Construir a base de engenharia para trabalhar com sistemas probabilísticos (LLMs) de forma robusta, assíncrona e pronta para produção.</a:t>
             </a:r>
           </a:p>
           <a:p/>
@@ -1270,28 +1131,33 @@
           </a:p>
           <a:p>
             <a:r>
-              <a:t>  • AI Engineer: arquiteta contexto, dados, fluxos e validações para LLMs</a:t>
-            </a:r>
-          </a:p>
-          <a:p>
-            <a:r>
-              <a:t>  • Transformar probabilístico → determinístico e confiável</a:t>
-            </a:r>
-          </a:p>
-          <a:p>
-            <a:r>
-              <a:t>  • Domínios práticos: Python assíncrono, APIs, dados, Vector DB, observabilidade</a:t>
-            </a:r>
-          </a:p>
-          <a:p>
-            <a:r>
-              <a:t>  • Desafios reais: alucinações, custos, latência e segurança</a:t>
+              <a:t>  • Entender o papel do AI Engineer e os pilares do trabalho (LLMs + arquitetura + produção)</a:t>
+            </a:r>
+          </a:p>
+          <a:p>
+            <a:r>
+              <a:t>  • Dominar a “física” dos LLMs (tokens, context window, sampling) e quando usar prompting vs RAG vs fine-tuning</a:t>
+            </a:r>
+          </a:p>
+          <a:p>
+            <a:r>
+              <a:t>  • Aplicar Python moderno e padrões de engenharia (Pydantic, AsyncIO, resiliência/tenacity, observabilidade)</a:t>
+            </a:r>
+          </a:p>
+          <a:p>
+            <a:r>
+              <a:t>  • Construir APIs assíncronas com FastAPI e contratos de dados rigorosos para saídas estruturadas</a:t>
+            </a:r>
+          </a:p>
+          <a:p>
+            <a:r>
+              <a:t>  • Modelar dados e integrações híbridas (SQL + Vector DB), com métricas e indexação</a:t>
             </a:r>
           </a:p>
           <a:p/>
           <a:p>
             <a:r>
-              <a:t>Mensagem principal: Você não aprende só a promptar: aprende a operar sistemas de IA.</a:t>
+              <a:t>Mensagem principal: Depois que você entende como LLMs funcionam e como engenharia sustenta produção, fica muito mais fácil escolher o caminho certo (prompting, RAG ou fine-tuning) e construir APIs confiáveis.</a:t>
             </a:r>
           </a:p>
         </p:txBody>
@@ -1361,39 +1227,37 @@
           <a:lstStyle/>
           <a:p>
             <a:r>
-              <a:t>Objetivo: Situar o Bloco 1 e mostrar as competências técnicas-base para produção.</a:t>
-            </a:r>
-          </a:p>
-          <a:p/>
-          <a:p>
-            <a:r>
               <a:t>Bullets:</a:t>
             </a:r>
           </a:p>
           <a:p>
             <a:r>
-              <a:t>  • Base técnica para sistemas probabilísticos, assíncronos e orientados a produção</a:t>
-            </a:r>
-          </a:p>
-          <a:p>
-            <a:r>
-              <a:t>  • Contratos estruturados para outputs de LLM (Pydantic/JSON Schema)</a:t>
-            </a:r>
-          </a:p>
-          <a:p>
-            <a:r>
-              <a:t>  • APIs assíncronas e integração com RAG/Modelos</a:t>
-            </a:r>
-          </a:p>
-          <a:p>
-            <a:r>
-              <a:t>  • Armazenamento híbrido: SQL + Vector DB</a:t>
-            </a:r>
-          </a:p>
-          <a:p/>
-          <a:p>
-            <a:r>
-              <a:t>Mensagem principal: Fundamentos de software robusto com núcleo probabilístico e dependências externas.</a:t>
+              <a:t>  • Módulo 01: A Profissão de AI Engineer &amp; Mercado — papel profissional, diferenças e pilares do trabalho</a:t>
+            </a:r>
+          </a:p>
+          <a:p>
+            <a:r>
+              <a:t>  • Módulo 02: Fundamentos de LLMs &amp; GenAI — tokens, contexto, prompting e estratégia RAG vs fine-tuning</a:t>
+            </a:r>
+          </a:p>
+          <a:p>
+            <a:r>
+              <a:t>  • Módulo 03: Python Moderno para AI Engineers — stack, bibliotecas core e observabilidade</a:t>
+            </a:r>
+          </a:p>
+          <a:p>
+            <a:r>
+              <a:t>  • Módulo 04: APIs &amp; Backend com FastAPI — APIs assíncronas, validação e integração segura</a:t>
+            </a:r>
+          </a:p>
+          <a:p>
+            <a:r>
+              <a:t>  • Módulo 05: Modelagem e Contratos de Dados (Pydantic V2) — schemas, validação e pipeline com retries</a:t>
+            </a:r>
+          </a:p>
+          <a:p>
+            <a:r>
+              <a:t>  • Módulo 06: Bancos de Dados (SQL + Vetorial) — embeddings, busca semântica, Qdrant e arquitetura híbrida</a:t>
             </a:r>
           </a:p>
         </p:txBody>
@@ -1463,7 +1327,7 @@
           <a:lstStyle/>
           <a:p>
             <a:r>
-              <a:t>Objetivo: Consolidar os principais temas do Bloco 1 em um plano executável.</a:t>
+              <a:t>Objetivo: Conectar LLMs a dados privados com pipelines de ingestão, retrieval eficiente, avaliação contínua e deploy seguro.</a:t>
             </a:r>
           </a:p>
           <a:p/>
@@ -1474,38 +1338,33 @@
           </a:p>
           <a:p>
             <a:r>
-              <a:t>  • Papel profissional e mindset de produto/sistemas</a:t>
-            </a:r>
-          </a:p>
-          <a:p>
-            <a:r>
-              <a:t>  • Física dos LLMs + estratégias (quando RAG vs fine-tuning)</a:t>
-            </a:r>
-          </a:p>
-          <a:p>
-            <a:r>
-              <a:t>  • Python moderno: tipagem, AsyncIO, resiliência (retries)</a:t>
-            </a:r>
-          </a:p>
-          <a:p>
-            <a:r>
-              <a:t>  • FastAPI: contratos, validação e OpenAPI</a:t>
-            </a:r>
-          </a:p>
-          <a:p>
-            <a:r>
-              <a:t>  • Modelagem e contratos de dados: schemas, validadores e parsing com retries</a:t>
-            </a:r>
-          </a:p>
-          <a:p>
-            <a:r>
-              <a:t>  • Databases: embeddings, métricas (cosseno/dot) e arquitetura híbrida SQL+Vetorial</a:t>
+              <a:t>  • Aprender o modelo mental de RAG (Ingestion → Store → Retrieve → Generate)</a:t>
+            </a:r>
+          </a:p>
+          <a:p>
+            <a:r>
+              <a:t>  • Construir pipelines de ingestão com chunking e metadados que elevam a qualidade do retrieval</a:t>
+            </a:r>
+          </a:p>
+          <a:p>
+            <a:r>
+              <a:t>  • Escolher embeddings e indexar em Vector DBs com entendimento de tradeoffs</a:t>
+            </a:r>
+          </a:p>
+          <a:p>
+            <a:r>
+              <a:t>  • Implementar estratégias de retrieval (hybrid, reranking, query expansion)</a:t>
+            </a:r>
+          </a:p>
+          <a:p>
+            <a:r>
+              <a:t>  • Adicionar avaliação/observabilidade e preparar RAG para produção (segurança e custos)</a:t>
             </a:r>
           </a:p>
           <a:p/>
           <a:p>
             <a:r>
-              <a:t>Mensagem principal: Você cria a “infra de confiabilidade” para sustentar LLMs em produção.</a:t>
+              <a:t>Mensagem principal: Agora que você já domina a base de engenharia do Bloco 1, o RAG vira a ponte para dar respostas ancoradas em dados reais — com performance e controle.</a:t>
             </a:r>
           </a:p>
         </p:txBody>
@@ -1575,39 +1434,52 @@
           <a:lstStyle/>
           <a:p>
             <a:r>
-              <a:t>Objetivo: Definir RAG e preparar o aluno para ingestion, retrieval, avaliação e deploy.</a:t>
-            </a:r>
-          </a:p>
-          <a:p/>
-          <a:p>
-            <a:r>
               <a:t>Bullets:</a:t>
             </a:r>
           </a:p>
           <a:p>
             <a:r>
-              <a:t>  • Objetivo: conectar LLMs aos seus dados privados</a:t>
-            </a:r>
-          </a:p>
-          <a:p>
-            <a:r>
-              <a:t>  • Arquitetura mais comum em produção</a:t>
-            </a:r>
-          </a:p>
-          <a:p>
-            <a:r>
-              <a:t>  • Pipeline: Ingestão → Store → Retrieve → Generate</a:t>
-            </a:r>
-          </a:p>
-          <a:p>
-            <a:r>
-              <a:t>  • Avaliação e observabilidade como parte do sistema</a:t>
-            </a:r>
-          </a:p>
-          <a:p/>
-          <a:p>
-            <a:r>
-              <a:t>Mensagem principal: RAG é um sistema: dados, busca, geração e validação contínuas.</a:t>
+              <a:t>  • Módulo 1: Fundamentos de RAG e Modelos Mentais — definição, por que RAG e arquitetura padrão</a:t>
+            </a:r>
+          </a:p>
+          <a:p>
+            <a:r>
+              <a:t>  • Módulo 2: Ingestão de Dados e Pipelines — ETL para IA, chunking e metadados</a:t>
+            </a:r>
+          </a:p>
+          <a:p>
+            <a:r>
+              <a:t>  • Módulo 3: Embeddings (Visão Moderna) — conceitos, modelos e lidar com multi-idioma</a:t>
+            </a:r>
+          </a:p>
+          <a:p>
+            <a:r>
+              <a:t>  • Módulo 4: Vetor Databases (Vector DBs) — Qdrant/pgvector, HNSW e tradeoffs</a:t>
+            </a:r>
+          </a:p>
+          <a:p>
+            <a:r>
+              <a:t>  • Módulo 5: Estratégias de Retrieval (Crítico) — hybrid search, reranking e query expansion</a:t>
+            </a:r>
+          </a:p>
+          <a:p>
+            <a:r>
+              <a:t>  • Módulo 6: RAG Agents — LangChain vs LlamaIndex e tool use para busca sob demanda</a:t>
+            </a:r>
+          </a:p>
+          <a:p>
+            <a:r>
+              <a:t>  • Módulo 7: Graph RAG — knowledge graphs e Graph RAG do zero</a:t>
+            </a:r>
+          </a:p>
+          <a:p>
+            <a:r>
+              <a:t>  • Módulo 8: Avaliação e Observabilidade — Ragas, tracing e golden datasets</a:t>
+            </a:r>
+          </a:p>
+          <a:p>
+            <a:r>
+              <a:t>  • Módulo 09: RAG em Produção — otimização, segurança (prompt injection) e custos</a:t>
             </a:r>
           </a:p>
         </p:txBody>
@@ -1677,7 +1549,7 @@
           <a:lstStyle/>
           <a:p>
             <a:r>
-              <a:t>Objetivo: Resumir os componentes técnicos do Bloco 2 em categorias de arquitetura.</a:t>
+              <a:t>Objetivo: Projetar, orquestrar e operar agentes confiáveis, com tool calling estruturado, memória e guardrails para produção.</a:t>
             </a:r>
           </a:p>
           <a:p/>
@@ -1688,38 +1560,33 @@
           </a:p>
           <a:p>
             <a:r>
-              <a:t>  • Ingestão/ETL e chunking (fixed/recursive/semantic) + metadados</a:t>
-            </a:r>
-          </a:p>
-          <a:p>
-            <a:r>
-              <a:t>  • Embeddings (modelos OpenAI vs open-source) e suporte a multimodalidade linguística</a:t>
-            </a:r>
-          </a:p>
-          <a:p>
-            <a:r>
-              <a:t>  • Vector DBs (Qdrant/pgvector) e indexação (HNSW) com tradeoffs</a:t>
-            </a:r>
-          </a:p>
-          <a:p>
-            <a:r>
-              <a:t>  • Retrieval: hybrid search, reranking e query expansion</a:t>
-            </a:r>
-          </a:p>
-          <a:p>
-            <a:r>
-              <a:t>  • RAG Agents e Graph RAG: busca orientada a ferramentas e conhecimento estruturado</a:t>
-            </a:r>
-          </a:p>
-          <a:p>
-            <a:r>
-              <a:t>  • Avaliação (RAGAS/faithfulness) + tracing + produção (segurança/custos)</a:t>
+              <a:t>  • Entender a diferença real entre workflow e agente (loop de raciocínio)</a:t>
+            </a:r>
+          </a:p>
+          <a:p>
+            <a:r>
+              <a:t>  • Aplicar arquiteturas modernas (ReAct, Plan-and-Solve, Reflection) e pensar em spectrum de complexidade</a:t>
+            </a:r>
+          </a:p>
+          <a:p>
+            <a:r>
+              <a:t>  • Construir agentes com tool calling e structured outputs validados</a:t>
+            </a:r>
+          </a:p>
+          <a:p>
+            <a:r>
+              <a:t>  • Orquestrar com LangGraph usando grafos de estado, loops e persistência</a:t>
+            </a:r>
+          </a:p>
+          <a:p>
+            <a:r>
+              <a:t>  • Implementar memória, multi-agents, human-in-the-loop e preparar para deploy e monitoramento</a:t>
             </a:r>
           </a:p>
           <a:p/>
           <a:p>
             <a:r>
-              <a:t>Mensagem principal: Você aprende a operar qualidade de resposta com avaliação e monitoramento.</a:t>
+              <a:t>Mensagem principal: Com RAG funcionando em produção, chega a hora de ir além da “resposta” e orquestrar ações — agentes que consultam, decidem e executam com segurança.</a:t>
             </a:r>
           </a:p>
         </p:txBody>
@@ -1789,39 +1656,52 @@
           <a:lstStyle/>
           <a:p>
             <a:r>
-              <a:t>Objetivo: Introduzir o conceito de agente e orientar para orquestração e segurança em produção.</a:t>
-            </a:r>
-          </a:p>
-          <a:p/>
-          <a:p>
-            <a:r>
               <a:t>Bullets:</a:t>
             </a:r>
           </a:p>
           <a:p>
             <a:r>
-              <a:t>  • Agentes têm autonomia controlada</a:t>
-            </a:r>
-          </a:p>
-          <a:p>
-            <a:r>
-              <a:t>  • Fronteira da Engenharia de IA (2026)</a:t>
-            </a:r>
-          </a:p>
-          <a:p>
-            <a:r>
-              <a:t>  • Ferramentas + state machines (grafos) + guardrails</a:t>
-            </a:r>
-          </a:p>
-          <a:p>
-            <a:r>
-              <a:t>  • Observabilidade e human-in-the-loop</a:t>
-            </a:r>
-          </a:p>
-          <a:p/>
-          <a:p>
-            <a:r>
-              <a:t>Mensagem principal: Agentes são sistemas: fluxo, memória, ferramentas, aprovações e métricas.</a:t>
+              <a:t>  • Módulo 1: Fundamentos de Agentes e Arquiteturas — workflow vs agente e padrões de arquitetura</a:t>
+            </a:r>
+          </a:p>
+          <a:p>
+            <a:r>
+              <a:t>  • Módulo 2: Criando seu primeiro Agente — tool calling com schemas e structured output</a:t>
+            </a:r>
+          </a:p>
+          <a:p>
+            <a:r>
+              <a:t>  • Módulo 3: LangGraph e Orquestração — state machines, controle de fluxo e recuperação de erros</a:t>
+            </a:r>
+          </a:p>
+          <a:p>
+            <a:r>
+              <a:t>  • Módulo 4: Sistemas de Memória — short-term, long-term e engenharia de memória</a:t>
+            </a:r>
+          </a:p>
+          <a:p>
+            <a:r>
+              <a:t>  • Módulo 5: Ferramentas e MCP — integrações com Model Context Protocol</a:t>
+            </a:r>
+          </a:p>
+          <a:p>
+            <a:r>
+              <a:t>  • Módulo 6: Human-in-the-Loop — aprovação, interrupção do grafo e auditoria</a:t>
+            </a:r>
+          </a:p>
+          <a:p>
+            <a:r>
+              <a:t>  • Módulo 7: Multi-Agent Systems — padrões de delegação e impacto de custo</a:t>
+            </a:r>
+          </a:p>
+          <a:p>
+            <a:r>
+              <a:t>  • Módulo 8: Deep Agents — riscos, guardrails e avaliação de trajetórias</a:t>
+            </a:r>
+          </a:p>
+          <a:p>
+            <a:r>
+              <a:t>  • Módulo 9: Agentes de IA em Produção — observabilidade (Langfuse), deploy/versão e monitoramento</a:t>
             </a:r>
           </a:p>
         </p:txBody>
@@ -1891,7 +1771,7 @@
           <a:lstStyle/>
           <a:p>
             <a:r>
-              <a:t>Objetivo: Organizar as competências do Bloco 3 em uma visão de arquitetura de agentes.</a:t>
+              <a:t>Objetivo: Rodar modelos localmente e em produção com eficiência, além de construir pipelines OCR robustos e avaliáveis.</a:t>
             </a:r>
           </a:p>
           <a:p/>
@@ -1902,53 +1782,33 @@
           </a:p>
           <a:p>
             <a:r>
-              <a:t>  • Workflow vs agente (loop de raciocínio) + padrões (ReAct/Plan-Solve/Reflection)</a:t>
-            </a:r>
-          </a:p>
-          <a:p>
-            <a:r>
-              <a:t>  • Tool calling com schemas e structured outputs</a:t>
-            </a:r>
-          </a:p>
-          <a:p>
-            <a:r>
-              <a:t>  • LangGraph: grafos de estado, loops, retries e persistência</a:t>
-            </a:r>
-          </a:p>
-          <a:p>
-            <a:r>
-              <a:t>  • Memória: curto vs longo prazo (persistência e Vector DB)</a:t>
-            </a:r>
-          </a:p>
-          <a:p>
-            <a:r>
-              <a:t>  • Integrações via MCP e desacoplamento modelo↔ferramenta</a:t>
-            </a:r>
-          </a:p>
-          <a:p>
-            <a:r>
-              <a:t>  • Human-in-the-loop: aprovação, interrupção e auditoria</a:t>
-            </a:r>
-          </a:p>
-          <a:p>
-            <a:r>
-              <a:t>  • Multi-agents: delegação e custo</a:t>
-            </a:r>
-          </a:p>
-          <a:p>
-            <a:r>
-              <a:t>  • Guardrails e avaliação de trajetórias</a:t>
-            </a:r>
-          </a:p>
-          <a:p>
-            <a:r>
-              <a:t>  • Produção: versionamento, deploy e monitoramento (tracing/métricas)</a:t>
+              <a:t>  • Entender que OCR envolve layout, tabelas e estrutura (não só texto)</a:t>
+            </a:r>
+          </a:p>
+          <a:p>
+            <a:r>
+              <a:t>  • Projetar pipelines com pré/pós-processamento, chunking e decisões de custo/qualidade</a:t>
+            </a:r>
+          </a:p>
+          <a:p>
+            <a:r>
+              <a:t>  • Aplicar Document Intelligence end-to-end (fila, idempotência e indexação)</a:t>
+            </a:r>
+          </a:p>
+          <a:p>
+            <a:r>
+              <a:t>  • Trabalhar com ecossistema Hugging Face (formats e quantização) e visão LLMs/VLMs</a:t>
+            </a:r>
+          </a:p>
+          <a:p>
+            <a:r>
+              <a:t>  • Servir modelos com Ollama/vLLM e otimizar GPU (VRAM, throughput e unit economics)</a:t>
             </a:r>
           </a:p>
           <a:p/>
           <a:p>
             <a:r>
-              <a:t>Mensagem principal: Você controla autonomia e mede eficácia para colocar agentes no mundo real.</a:t>
+              <a:t>Mensagem principal: Quando você passa a depender de dados documentais e inferência eficiente, a Engenharia de IA vira infraestrutura — e o Bloco 4 resolve exatamente isso.</a:t>
             </a:r>
           </a:p>
         </p:txBody>
@@ -4964,44 +4824,35 @@
       <p:grpSpPr/>
       <p:sp>
         <p:nvSpPr>
-          <p:cNvPr id="2" name="Rectangle 1"/>
-          <p:cNvSpPr/>
-          <p:nvPr/>
-        </p:nvSpPr>
-        <p:spPr>
-          <a:xfrm>
-            <a:off x="0" y="0"/>
-            <a:ext cx="12191695" cy="64008"/>
-          </a:xfrm>
-          <a:prstGeom prst="rect">
-            <a:avLst/>
-          </a:prstGeom>
-          <a:solidFill>
-            <a:srgbClr val="00C2CB"/>
-          </a:solidFill>
-          <a:ln>
-            <a:noFill/>
-          </a:ln>
-        </p:spPr>
-        <p:style>
-          <a:lnRef idx="1">
-            <a:schemeClr val="accent1"/>
-          </a:lnRef>
-          <a:fillRef idx="3">
-            <a:schemeClr val="accent1"/>
-          </a:fillRef>
-          <a:effectRef idx="2">
-            <a:schemeClr val="accent1"/>
-          </a:effectRef>
-          <a:fontRef idx="minor">
-            <a:schemeClr val="lt1"/>
-          </a:fontRef>
-        </p:style>
-        <p:txBody>
-          <a:bodyPr rtlCol="0" anchor="ctr"/>
+          <p:cNvPr id="2" name="TextBox 1"/>
+          <p:cNvSpPr txBox="1"/>
+          <p:nvPr/>
+        </p:nvSpPr>
+        <p:spPr>
+          <a:xfrm>
+            <a:off x="457200" y="1828800"/>
+            <a:ext cx="11247120" cy="1371600"/>
+          </a:xfrm>
+          <a:prstGeom prst="rect">
+            <a:avLst/>
+          </a:prstGeom>
+          <a:noFill/>
+        </p:spPr>
+        <p:txBody>
+          <a:bodyPr wrap="square">
+            <a:spAutoFit/>
+          </a:bodyPr>
           <a:lstStyle/>
           <a:p>
             <a:pPr algn="ctr"/>
+            <a:r>
+              <a:rPr sz="4000" b="1">
+                <a:solidFill>
+                  <a:srgbClr val="FFFFFF"/>
+                </a:solidFill>
+              </a:rPr>
+              <a:t>Trilha Completa: Engenharia de IA</a:t>
+            </a:r>
           </a:p>
         </p:txBody>
       </p:sp>
@@ -5013,7 +4864,7 @@
         </p:nvSpPr>
         <p:spPr>
           <a:xfrm>
-            <a:off x="457200" y="228600"/>
+            <a:off x="457200" y="3474720"/>
             <a:ext cx="11247120" cy="731520"/>
           </a:xfrm>
           <a:prstGeom prst="rect">
@@ -5027,14 +4878,14 @@
           </a:bodyPr>
           <a:lstStyle/>
           <a:p>
-            <a:pPr algn="l"/>
-            <a:r>
-              <a:rPr sz="2600" b="1">
+            <a:pPr algn="ctr"/>
+            <a:r>
+              <a:rPr sz="2000" b="0">
                 <a:solidFill>
                   <a:srgbClr val="00C2CB"/>
                 </a:solidFill>
               </a:rPr>
-              <a:t>Trilha Completa: Engenharia de IA</a:t>
+              <a:t>Jornada de Dados — do fundamento ao deploy: LLMs, RAG e agentes em produção</a:t>
             </a:r>
           </a:p>
         </p:txBody>
@@ -5047,164 +4898,28 @@
         </p:nvSpPr>
         <p:spPr>
           <a:xfrm>
-            <a:off x="457200" y="1051560"/>
-            <a:ext cx="11247120" cy="502920"/>
-          </a:xfrm>
-          <a:prstGeom prst="rect">
-            <a:avLst/>
-          </a:prstGeom>
-          <a:noFill/>
-        </p:spPr>
-        <p:txBody>
-          <a:bodyPr wrap="square">
-            <a:spAutoFit/>
-          </a:bodyPr>
-          <a:lstStyle/>
-          <a:p>
-            <a:pPr algn="l"/>
-            <a:r>
-              <a:rPr sz="1500" b="0">
-                <a:solidFill>
-                  <a:srgbClr val="FFFFFF"/>
-                </a:solidFill>
-              </a:rPr>
-              <a:t>Abrir com um gancho comercial conectando engenharia aplicada à Jornada de Dados.</a:t>
-            </a:r>
-          </a:p>
-        </p:txBody>
-      </p:sp>
-      <p:sp>
-        <p:nvSpPr>
-          <p:cNvPr id="5" name="TextBox 4"/>
-          <p:cNvSpPr txBox="1"/>
-          <p:nvPr/>
-        </p:nvSpPr>
-        <p:spPr>
-          <a:xfrm>
-            <a:off x="640080" y="1691640"/>
-            <a:ext cx="10515600" cy="502920"/>
-          </a:xfrm>
-          <a:prstGeom prst="rect">
-            <a:avLst/>
-          </a:prstGeom>
-          <a:noFill/>
-        </p:spPr>
-        <p:txBody>
-          <a:bodyPr wrap="square">
-            <a:spAutoFit/>
-          </a:bodyPr>
-          <a:lstStyle/>
-          <a:p>
-            <a:pPr algn="l"/>
-            <a:r>
-              <a:rPr sz="1500" b="0">
-                <a:solidFill>
-                  <a:srgbClr val="FFFFFF"/>
-                </a:solidFill>
-              </a:rPr>
-              <a:t>•  Sistemas de IA, RAG e agentes em produção</a:t>
-            </a:r>
-          </a:p>
-        </p:txBody>
-      </p:sp>
-      <p:sp>
-        <p:nvSpPr>
-          <p:cNvPr id="6" name="TextBox 5"/>
-          <p:cNvSpPr txBox="1"/>
-          <p:nvPr/>
-        </p:nvSpPr>
-        <p:spPr>
-          <a:xfrm>
-            <a:off x="640080" y="2240280"/>
-            <a:ext cx="10515600" cy="502920"/>
-          </a:xfrm>
-          <a:prstGeom prst="rect">
-            <a:avLst/>
-          </a:prstGeom>
-          <a:noFill/>
-        </p:spPr>
-        <p:txBody>
-          <a:bodyPr wrap="square">
-            <a:spAutoFit/>
-          </a:bodyPr>
-          <a:lstStyle/>
-          <a:p>
-            <a:pPr algn="l"/>
-            <a:r>
-              <a:rPr sz="1500" b="0">
-                <a:solidFill>
-                  <a:srgbClr val="FFFFFF"/>
-                </a:solidFill>
-              </a:rPr>
-              <a:t>•  Arquitetura, orquestração, observabilidade e deploy</a:t>
-            </a:r>
-          </a:p>
-        </p:txBody>
-      </p:sp>
-      <p:sp>
-        <p:nvSpPr>
-          <p:cNvPr id="7" name="TextBox 6"/>
-          <p:cNvSpPr txBox="1"/>
-          <p:nvPr/>
-        </p:nvSpPr>
-        <p:spPr>
-          <a:xfrm>
-            <a:off x="640080" y="2788920"/>
-            <a:ext cx="10515600" cy="502920"/>
-          </a:xfrm>
-          <a:prstGeom prst="rect">
-            <a:avLst/>
-          </a:prstGeom>
-          <a:noFill/>
-        </p:spPr>
-        <p:txBody>
-          <a:bodyPr wrap="square">
-            <a:spAutoFit/>
-          </a:bodyPr>
-          <a:lstStyle/>
-          <a:p>
-            <a:pPr algn="l"/>
-            <a:r>
-              <a:rPr sz="1500" b="0">
-                <a:solidFill>
-                  <a:srgbClr val="FFFFFF"/>
-                </a:solidFill>
-              </a:rPr>
-              <a:t>•  De desenvolvedor → AI Engineer</a:t>
-            </a:r>
-          </a:p>
-        </p:txBody>
-      </p:sp>
-      <p:sp>
-        <p:nvSpPr>
-          <p:cNvPr id="8" name="TextBox 7"/>
-          <p:cNvSpPr txBox="1"/>
-          <p:nvPr/>
-        </p:nvSpPr>
-        <p:spPr>
-          <a:xfrm>
-            <a:off x="457200" y="6035040"/>
-            <a:ext cx="11247120" cy="502920"/>
-          </a:xfrm>
-          <a:prstGeom prst="rect">
-            <a:avLst/>
-          </a:prstGeom>
-          <a:noFill/>
-        </p:spPr>
-        <p:txBody>
-          <a:bodyPr wrap="square">
-            <a:spAutoFit/>
-          </a:bodyPr>
-          <a:lstStyle/>
-          <a:p>
-            <a:pPr algn="l"/>
-            <a:r>
-              <a:rPr sz="1300" b="0">
+            <a:off x="457200" y="4572000"/>
+            <a:ext cx="11247120" cy="548640"/>
+          </a:xfrm>
+          <a:prstGeom prst="rect">
+            <a:avLst/>
+          </a:prstGeom>
+          <a:noFill/>
+        </p:spPr>
+        <p:txBody>
+          <a:bodyPr wrap="square">
+            <a:spAutoFit/>
+          </a:bodyPr>
+          <a:lstStyle/>
+          <a:p>
+            <a:pPr algn="ctr"/>
+            <a:r>
+              <a:rPr sz="1600" b="0">
                 <a:solidFill>
                   <a:srgbClr val="00C2CB"/>
                 </a:solidFill>
               </a:rPr>
-              <a:t>Uma formação prática para transformar modelos em produtos confiáveis.</a:t>
+              <a:t>Jornada de Dados — Engenheiro de IA</a:t>
             </a:r>
           </a:p>
         </p:txBody>
@@ -5307,7 +5022,7 @@
                   <a:srgbClr val="00C2CB"/>
                 </a:solidFill>
               </a:rPr>
-              <a:t>Bloco 4 — Infra, OCR e modelos: inferência eficiente e confiável</a:t>
+              <a:t>Bloco 4: Infra, OCR e Modelos (Inferência em Produção)</a:t>
             </a:r>
           </a:p>
         </p:txBody>
@@ -5341,7 +5056,7 @@
                   <a:srgbClr val="FFFFFF"/>
                 </a:solidFill>
               </a:rPr>
-              <a:t>Mostrar por que OCR e inferência local/produção exigem engenharia real de pipeline e performance.</a:t>
+              <a:t>Rodar modelos localmente e em produção com eficiência, além de construir pipelines OCR robustos e avaliáveis.</a:t>
             </a:r>
           </a:p>
         </p:txBody>
@@ -5375,7 +5090,7 @@
                   <a:srgbClr val="FFFFFF"/>
                 </a:solidFill>
               </a:rPr>
-              <a:t>→  Rodar modelos eficiente, barata e confiavelmente</a:t>
+              <a:t>→  Entender que OCR envolve layout, tabelas e estrutura (não só texto)</a:t>
             </a:r>
           </a:p>
         </p:txBody>
@@ -5409,7 +5124,7 @@
                   <a:srgbClr val="FFFFFF"/>
                 </a:solidFill>
               </a:rPr>
-              <a:t>→  Onde engenharia de software encontra “metal”</a:t>
+              <a:t>→  Projetar pipelines com pré/pós-processamento, chunking e decisões de custo/qualidade</a:t>
             </a:r>
           </a:p>
         </p:txBody>
@@ -5443,7 +5158,7 @@
                   <a:srgbClr val="FFFFFF"/>
                 </a:solidFill>
               </a:rPr>
-              <a:t>→  OCR moderno: layout/tabelas/estrutura, não só texto</a:t>
+              <a:t>→  Aplicar Document Intelligence end-to-end (fila, idempotência e indexação)</a:t>
             </a:r>
           </a:p>
         </p:txBody>
@@ -5477,7 +5192,7 @@
                   <a:srgbClr val="FFFFFF"/>
                 </a:solidFill>
               </a:rPr>
-              <a:t>→  Performance: GPU (VRAM), throughput e unit economics</a:t>
+              <a:t>→  Trabalhar com ecossistema Hugging Face (formats e quantização) e visão LLMs/VLMs</a:t>
             </a:r>
           </a:p>
         </p:txBody>
@@ -5485,6 +5200,40 @@
       <p:sp>
         <p:nvSpPr>
           <p:cNvPr id="9" name="TextBox 8"/>
+          <p:cNvSpPr txBox="1"/>
+          <p:nvPr/>
+        </p:nvSpPr>
+        <p:spPr>
+          <a:xfrm>
+            <a:off x="731520" y="4480559"/>
+            <a:ext cx="10515600" cy="457200"/>
+          </a:xfrm>
+          <a:prstGeom prst="rect">
+            <a:avLst/>
+          </a:prstGeom>
+          <a:noFill/>
+        </p:spPr>
+        <p:txBody>
+          <a:bodyPr wrap="square">
+            <a:spAutoFit/>
+          </a:bodyPr>
+          <a:lstStyle/>
+          <a:p>
+            <a:pPr algn="l"/>
+            <a:r>
+              <a:rPr sz="1500" b="0">
+                <a:solidFill>
+                  <a:srgbClr val="FFFFFF"/>
+                </a:solidFill>
+              </a:rPr>
+              <a:t>→  Servir modelos com Ollama/vLLM e otimizar GPU (VRAM, throughput e unit economics)</a:t>
+            </a:r>
+          </a:p>
+        </p:txBody>
+      </p:sp>
+      <p:sp>
+        <p:nvSpPr>
+          <p:cNvPr id="10" name="TextBox 9"/>
           <p:cNvSpPr txBox="1"/>
           <p:nvPr/>
         </p:nvSpPr>
@@ -5511,7 +5260,7 @@
                   <a:srgbClr val="00C2CB"/>
                 </a:solidFill>
               </a:rPr>
-              <a:t>Pipeline &gt; modelo: você constrói sistemas que funcionam sob carga.</a:t>
+              <a:t>Quando você passa a depender de dados documentais e inferência eficiente, a Engenharia de IA vira infraestrutura — e o Bloco 4 resolve exatamente isso.</a:t>
             </a:r>
           </a:p>
         </p:txBody>
@@ -5614,7 +5363,7 @@
                   <a:srgbClr val="00C2CB"/>
                 </a:solidFill>
               </a:rPr>
-              <a:t>Bloco 4 — O que aprender (síntese de infra + OCR)</a:t>
+              <a:t>Aulas — Bloco 4</a:t>
             </a:r>
           </a:p>
         </p:txBody>
@@ -5627,8 +5376,8 @@
         </p:nvSpPr>
         <p:spPr>
           <a:xfrm>
-            <a:off x="457200" y="1051560"/>
-            <a:ext cx="11247120" cy="502920"/>
+            <a:off x="640080" y="1188720"/>
+            <a:ext cx="10515600" cy="502920"/>
           </a:xfrm>
           <a:prstGeom prst="rect">
             <a:avLst/>
@@ -5648,7 +5397,7 @@
                   <a:srgbClr val="FFFFFF"/>
                 </a:solidFill>
               </a:rPr>
-              <a:t>Consolidar competências em OCR/document intelligence e inferência em produção.</a:t>
+              <a:t>•  Módulo 1: OCR Fundamentals — layout, desafios e métricas (CER/WER)</a:t>
             </a:r>
           </a:p>
         </p:txBody>
@@ -5661,7 +5410,7 @@
         </p:nvSpPr>
         <p:spPr>
           <a:xfrm>
-            <a:off x="640080" y="1691640"/>
+            <a:off x="640080" y="1737360"/>
             <a:ext cx="10515600" cy="502920"/>
           </a:xfrm>
           <a:prstGeom prst="rect">
@@ -5682,7 +5431,7 @@
                   <a:srgbClr val="FFFFFF"/>
                 </a:solidFill>
               </a:rPr>
-              <a:t>•  OCR Fundamentals: layout, ruído, métricas (CER/WER) e limitações</a:t>
+              <a:t>•  Módulo 2: OCR Pipelines — Tesseract vs Azure DI vs Vision LLMs, arquitetura e tradeoffs</a:t>
             </a:r>
           </a:p>
         </p:txBody>
@@ -5695,7 +5444,7 @@
         </p:nvSpPr>
         <p:spPr>
           <a:xfrm>
-            <a:off x="640080" y="2240280"/>
+            <a:off x="640080" y="2286000"/>
             <a:ext cx="10515600" cy="502920"/>
           </a:xfrm>
           <a:prstGeom prst="rect">
@@ -5716,7 +5465,7 @@
                   <a:srgbClr val="FFFFFF"/>
                 </a:solidFill>
               </a:rPr>
-              <a:t>•  OCR Pipelines: pré/pós-processamento, chunking e tradeoffs custo/qualidade/velocidade</a:t>
+              <a:t>•  Módulo 3: Document Intelligence — end-to-end, filas (SQS), idempotência, monitoramento</a:t>
             </a:r>
           </a:p>
         </p:txBody>
@@ -5729,7 +5478,7 @@
         </p:nvSpPr>
         <p:spPr>
           <a:xfrm>
-            <a:off x="640080" y="2788920"/>
+            <a:off x="640080" y="2834640"/>
             <a:ext cx="10515600" cy="502920"/>
           </a:xfrm>
           <a:prstGeom prst="rect">
@@ -5750,7 +5499,7 @@
                   <a:srgbClr val="FFFFFF"/>
                 </a:solidFill>
               </a:rPr>
-              <a:t>•  Document Intelligence: fila, idempotência, retries e monitoramento de falhas</a:t>
+              <a:t>•  Módulo 4: Hugging Face — safetensors/tokenizers/transformers e formatos (FP16/INT8/ GGUF/AWQ)</a:t>
             </a:r>
           </a:p>
         </p:txBody>
@@ -5763,7 +5512,7 @@
         </p:nvSpPr>
         <p:spPr>
           <a:xfrm>
-            <a:off x="640080" y="3337560"/>
+            <a:off x="640080" y="3383280"/>
             <a:ext cx="10515600" cy="502920"/>
           </a:xfrm>
           <a:prstGeom prst="rect">
@@ -5784,7 +5533,7 @@
                   <a:srgbClr val="FFFFFF"/>
                 </a:solidFill>
               </a:rPr>
-              <a:t>•  Hugging Face na prática: formatos/quantização (FP16/INT8/GGUF/AWQ) e Transformers/tokenizers</a:t>
+              <a:t>•  Módulo 5: Ollama — prototipagem local, limites e workflow para staging</a:t>
             </a:r>
           </a:p>
         </p:txBody>
@@ -5797,7 +5546,7 @@
         </p:nvSpPr>
         <p:spPr>
           <a:xfrm>
-            <a:off x="640080" y="3886200"/>
+            <a:off x="640080" y="3931920"/>
             <a:ext cx="10515600" cy="502920"/>
           </a:xfrm>
           <a:prstGeom prst="rect">
@@ -5818,7 +5567,7 @@
                   <a:srgbClr val="FFFFFF"/>
                 </a:solidFill>
               </a:rPr>
-              <a:t>•  Ollama para prototipar e workflow local→staging</a:t>
+              <a:t>•  Módulo 6: vLLM — continuous batching, paged attention e serving via OpenAI API</a:t>
             </a:r>
           </a:p>
         </p:txBody>
@@ -5831,7 +5580,7 @@
         </p:nvSpPr>
         <p:spPr>
           <a:xfrm>
-            <a:off x="640080" y="4434840"/>
+            <a:off x="640080" y="4480559"/>
             <a:ext cx="10515600" cy="502920"/>
           </a:xfrm>
           <a:prstGeom prst="rect">
@@ -5852,75 +5601,7 @@
                   <a:srgbClr val="FFFFFF"/>
                 </a:solidFill>
               </a:rPr>
-              <a:t>•  vLLM: continuous batching/paged attention e serving via OpenAI-compatible API</a:t>
-            </a:r>
-          </a:p>
-        </p:txBody>
-      </p:sp>
-      <p:sp>
-        <p:nvSpPr>
-          <p:cNvPr id="11" name="TextBox 10"/>
-          <p:cNvSpPr txBox="1"/>
-          <p:nvPr/>
-        </p:nvSpPr>
-        <p:spPr>
-          <a:xfrm>
-            <a:off x="640080" y="4983479"/>
-            <a:ext cx="10515600" cy="502920"/>
-          </a:xfrm>
-          <a:prstGeom prst="rect">
-            <a:avLst/>
-          </a:prstGeom>
-          <a:noFill/>
-        </p:spPr>
-        <p:txBody>
-          <a:bodyPr wrap="square">
-            <a:spAutoFit/>
-          </a:bodyPr>
-          <a:lstStyle/>
-          <a:p>
-            <a:pPr algn="l"/>
-            <a:r>
-              <a:rPr sz="1500" b="0">
-                <a:solidFill>
-                  <a:srgbClr val="FFFFFF"/>
-                </a:solidFill>
-              </a:rPr>
-              <a:t>•  Hardware &amp; Performance: VRAM, quantização e economia de tokens</a:t>
-            </a:r>
-          </a:p>
-        </p:txBody>
-      </p:sp>
-      <p:sp>
-        <p:nvSpPr>
-          <p:cNvPr id="12" name="TextBox 11"/>
-          <p:cNvSpPr txBox="1"/>
-          <p:nvPr/>
-        </p:nvSpPr>
-        <p:spPr>
-          <a:xfrm>
-            <a:off x="457200" y="6035040"/>
-            <a:ext cx="11247120" cy="502920"/>
-          </a:xfrm>
-          <a:prstGeom prst="rect">
-            <a:avLst/>
-          </a:prstGeom>
-          <a:noFill/>
-        </p:spPr>
-        <p:txBody>
-          <a:bodyPr wrap="square">
-            <a:spAutoFit/>
-          </a:bodyPr>
-          <a:lstStyle/>
-          <a:p>
-            <a:pPr algn="l"/>
-            <a:r>
-              <a:rPr sz="1300" b="0">
-                <a:solidFill>
-                  <a:srgbClr val="00C2CB"/>
-                </a:solidFill>
-              </a:rPr>
-              <a:t>Você transforma OCR e VLMs em produtos com custo e latência previsíveis.</a:t>
+              <a:t>•  Módulo 7: Hardware &amp; Performance — VRAM is king, unit economics e quantização</a:t>
             </a:r>
           </a:p>
         </p:txBody>
@@ -6023,7 +5704,7 @@
                   <a:srgbClr val="00C2CB"/>
                 </a:solidFill>
               </a:rPr>
-              <a:t>Bloco 5 — Fine-Tuning: especialização com consciência de custo</a:t>
+              <a:t>Bloco 5: Fine-Tuning e Especialização de Modelos</a:t>
             </a:r>
           </a:p>
         </p:txBody>
@@ -6057,7 +5738,7 @@
                   <a:srgbClr val="FFFFFF"/>
                 </a:solidFill>
               </a:rPr>
-              <a:t>Introduzir quando treinar e como evitar over-engineering (RAG/prompting vs fine-tuning).</a:t>
+              <a:t>Aprender quando treinar (e quando não treinar), preparar datasets corretamente e fazer deploy com foco em riscos e governança.</a:t>
             </a:r>
           </a:p>
         </p:txBody>
@@ -6091,7 +5772,7 @@
                   <a:srgbClr val="FFFFFF"/>
                 </a:solidFill>
               </a:rPr>
-              <a:t>→  Objetivo: saber quando treinar — e principalmente quando NÃO treinar</a:t>
+              <a:t>→  Decidir entre Fine-Tuning vs RAG vs prompting com uma matriz prática</a:t>
             </a:r>
           </a:p>
         </p:txBody>
@@ -6125,7 +5806,7 @@
                   <a:srgbClr val="FFFFFF"/>
                 </a:solidFill>
               </a:rPr>
-              <a:t>→  Especialização como “última milha”</a:t>
+              <a:t>→  Entender tipos de adaptação (LoRA/QLoRA, PEFT e full fine-tuning) e tradeoffs</a:t>
             </a:r>
           </a:p>
         </p:txBody>
@@ -6159,7 +5840,7 @@
                   <a:srgbClr val="FFFFFF"/>
                 </a:solidFill>
               </a:rPr>
-              <a:t>→  Técnicas: LoRA/QLoRA e preparação de datasets</a:t>
+              <a:t>→  Montar dataset com qualidade e formato de instruction datasets</a:t>
             </a:r>
           </a:p>
         </p:txBody>
@@ -6193,7 +5874,7 @@
                   <a:srgbClr val="FFFFFF"/>
                 </a:solidFill>
               </a:rPr>
-              <a:t>→  Deploy, riscos e governança</a:t>
+              <a:t>→  Fazer workflow real com Unsloth (treino e geração de adapters/formatos)</a:t>
             </a:r>
           </a:p>
         </p:txBody>
@@ -6201,6 +5882,40 @@
       <p:sp>
         <p:nvSpPr>
           <p:cNvPr id="9" name="TextBox 8"/>
+          <p:cNvSpPr txBox="1"/>
+          <p:nvPr/>
+        </p:nvSpPr>
+        <p:spPr>
+          <a:xfrm>
+            <a:off x="731520" y="4480559"/>
+            <a:ext cx="10515600" cy="457200"/>
+          </a:xfrm>
+          <a:prstGeom prst="rect">
+            <a:avLst/>
+          </a:prstGeom>
+          <a:noFill/>
+        </p:spPr>
+        <p:txBody>
+          <a:bodyPr wrap="square">
+            <a:spAutoFit/>
+          </a:bodyPr>
+          <a:lstStyle/>
+          <a:p>
+            <a:pPr algn="l"/>
+            <a:r>
+              <a:rPr sz="1500" b="0">
+                <a:solidFill>
+                  <a:srgbClr val="FFFFFF"/>
+                </a:solidFill>
+              </a:rPr>
+              <a:t>→  Preparar deploy e operação: adapters, merge, manutenção, riscos e conformidade</a:t>
+            </a:r>
+          </a:p>
+        </p:txBody>
+      </p:sp>
+      <p:sp>
+        <p:nvSpPr>
+          <p:cNvPr id="10" name="TextBox 9"/>
           <p:cNvSpPr txBox="1"/>
           <p:nvPr/>
         </p:nvSpPr>
@@ -6227,7 +5942,7 @@
                   <a:srgbClr val="00C2CB"/>
                 </a:solidFill>
               </a:rPr>
-              <a:t>Fine-tuning é decisão de engenharia: qualidade, custo e manutenção.</a:t>
+              <a:t>Depois de saber como conectar dados (RAG), orquestrar ações (agentes) e operar com eficiência (infra/OCR), o fine-tuning entra como especialização — só quando faz sentido.</a:t>
             </a:r>
           </a:p>
         </p:txBody>
@@ -6330,7 +6045,7 @@
                   <a:srgbClr val="00C2CB"/>
                 </a:solidFill>
               </a:rPr>
-              <a:t>Bloco 5 — O que aprender (síntese de ciclo completo)</a:t>
+              <a:t>Aulas — Bloco 5</a:t>
             </a:r>
           </a:p>
         </p:txBody>
@@ -6343,8 +6058,8 @@
         </p:nvSpPr>
         <p:spPr>
           <a:xfrm>
-            <a:off x="457200" y="1051560"/>
-            <a:ext cx="11247120" cy="502920"/>
+            <a:off x="640080" y="1188720"/>
+            <a:ext cx="10515600" cy="502920"/>
           </a:xfrm>
           <a:prstGeom prst="rect">
             <a:avLst/>
@@ -6364,7 +6079,7 @@
                   <a:srgbClr val="FFFFFF"/>
                 </a:solidFill>
               </a:rPr>
-              <a:t>Resumir o ciclo end-to-end de fine-tuning e como avaliar antes de deploy.</a:t>
+              <a:t>•  Módulo 1: Fundamentos de Fine-Tuning — adaptação de pesos vs injeção, matriz de decisão e tipos</a:t>
             </a:r>
           </a:p>
         </p:txBody>
@@ -6377,7 +6092,7 @@
         </p:nvSpPr>
         <p:spPr>
           <a:xfrm>
-            <a:off x="640080" y="1691640"/>
+            <a:off x="640080" y="1737360"/>
             <a:ext cx="10515600" cy="502920"/>
           </a:xfrm>
           <a:prstGeom prst="rect">
@@ -6398,7 +6113,7 @@
                   <a:srgbClr val="FFFFFF"/>
                 </a:solidFill>
               </a:rPr>
-              <a:t>•  Fine-tuning vs RAG/prompting: matriz de decisão</a:t>
+              <a:t>•  Módulo 2: Unsloth — workflow eficiente e geração de LoRA/GGUF</a:t>
             </a:r>
           </a:p>
         </p:txBody>
@@ -6411,7 +6126,7 @@
         </p:nvSpPr>
         <p:spPr>
           <a:xfrm>
-            <a:off x="640080" y="2240280"/>
+            <a:off x="640080" y="2286000"/>
             <a:ext cx="10515600" cy="502920"/>
           </a:xfrm>
           <a:prstGeom prst="rect">
@@ -6432,7 +6147,7 @@
                   <a:srgbClr val="FFFFFF"/>
                 </a:solidFill>
               </a:rPr>
-              <a:t>•  Tipos de adaptação: PEFT, LoRA, QLoRA e full fine-tuning</a:t>
+              <a:t>•  Módulo 3: Meu Primeiro LLM — dataset, preparação, treino e avaliação (baselines e LLM-as-a-Judge)</a:t>
             </a:r>
           </a:p>
         </p:txBody>
@@ -6445,7 +6160,7 @@
         </p:nvSpPr>
         <p:spPr>
           <a:xfrm>
-            <a:off x="640080" y="2788920"/>
+            <a:off x="640080" y="2834640"/>
             <a:ext cx="10515600" cy="502920"/>
           </a:xfrm>
           <a:prstGeom prst="rect">
@@ -6466,7 +6181,7 @@
                   <a:srgbClr val="FFFFFF"/>
                 </a:solidFill>
               </a:rPr>
-              <a:t>•  Unsloth: workflow eficiente (notebook→GGUF/adapter)</a:t>
+              <a:t>•  Módulo 4: Deploy do Modelo — adapters, merge e carregamento no runtime</a:t>
             </a:r>
           </a:p>
         </p:txBody>
@@ -6479,7 +6194,7 @@
         </p:nvSpPr>
         <p:spPr>
           <a:xfrm>
-            <a:off x="640080" y="3337560"/>
+            <a:off x="640080" y="3383280"/>
             <a:ext cx="10515600" cy="502920"/>
           </a:xfrm>
           <a:prstGeom prst="rect">
@@ -6500,143 +6215,7 @@
                   <a:srgbClr val="FFFFFF"/>
                 </a:solidFill>
               </a:rPr>
-              <a:t>•  Dataset engineering: instruction datasets + formatação</a:t>
-            </a:r>
-          </a:p>
-        </p:txBody>
-      </p:sp>
-      <p:sp>
-        <p:nvSpPr>
-          <p:cNvPr id="9" name="TextBox 8"/>
-          <p:cNvSpPr txBox="1"/>
-          <p:nvPr/>
-        </p:nvSpPr>
-        <p:spPr>
-          <a:xfrm>
-            <a:off x="640080" y="3886200"/>
-            <a:ext cx="10515600" cy="502920"/>
-          </a:xfrm>
-          <a:prstGeom prst="rect">
-            <a:avLst/>
-          </a:prstGeom>
-          <a:noFill/>
-        </p:spPr>
-        <p:txBody>
-          <a:bodyPr wrap="square">
-            <a:spAutoFit/>
-          </a:bodyPr>
-          <a:lstStyle/>
-          <a:p>
-            <a:pPr algn="l"/>
-            <a:r>
-              <a:rPr sz="1500" b="0">
-                <a:solidFill>
-                  <a:srgbClr val="FFFFFF"/>
-                </a:solidFill>
-              </a:rPr>
-              <a:t>•  Avaliação: baselines e LLM-as-a-Judge (ex.: GPT-4 como juiz)</a:t>
-            </a:r>
-          </a:p>
-        </p:txBody>
-      </p:sp>
-      <p:sp>
-        <p:nvSpPr>
-          <p:cNvPr id="10" name="TextBox 9"/>
-          <p:cNvSpPr txBox="1"/>
-          <p:nvPr/>
-        </p:nvSpPr>
-        <p:spPr>
-          <a:xfrm>
-            <a:off x="640080" y="4434840"/>
-            <a:ext cx="10515600" cy="502920"/>
-          </a:xfrm>
-          <a:prstGeom prst="rect">
-            <a:avLst/>
-          </a:prstGeom>
-          <a:noFill/>
-        </p:spPr>
-        <p:txBody>
-          <a:bodyPr wrap="square">
-            <a:spAutoFit/>
-          </a:bodyPr>
-          <a:lstStyle/>
-          <a:p>
-            <a:pPr algn="l"/>
-            <a:r>
-              <a:rPr sz="1500" b="0">
-                <a:solidFill>
-                  <a:srgbClr val="FFFFFF"/>
-                </a:solidFill>
-              </a:rPr>
-              <a:t>•  Deploy: adapters no vLLM, merge (quando e por quê)</a:t>
-            </a:r>
-          </a:p>
-        </p:txBody>
-      </p:sp>
-      <p:sp>
-        <p:nvSpPr>
-          <p:cNvPr id="11" name="TextBox 10"/>
-          <p:cNvSpPr txBox="1"/>
-          <p:nvPr/>
-        </p:nvSpPr>
-        <p:spPr>
-          <a:xfrm>
-            <a:off x="640080" y="4983479"/>
-            <a:ext cx="10515600" cy="502920"/>
-          </a:xfrm>
-          <a:prstGeom prst="rect">
-            <a:avLst/>
-          </a:prstGeom>
-          <a:noFill/>
-        </p:spPr>
-        <p:txBody>
-          <a:bodyPr wrap="square">
-            <a:spAutoFit/>
-          </a:bodyPr>
-          <a:lstStyle/>
-          <a:p>
-            <a:pPr algn="l"/>
-            <a:r>
-              <a:rPr sz="1500" b="0">
-                <a:solidFill>
-                  <a:srgbClr val="FFFFFF"/>
-                </a:solidFill>
-              </a:rPr>
-              <a:t>•  Produção: ops/custos, riscos (catastrophic forgetting) e compliance</a:t>
-            </a:r>
-          </a:p>
-        </p:txBody>
-      </p:sp>
-      <p:sp>
-        <p:nvSpPr>
-          <p:cNvPr id="12" name="TextBox 11"/>
-          <p:cNvSpPr txBox="1"/>
-          <p:nvPr/>
-        </p:nvSpPr>
-        <p:spPr>
-          <a:xfrm>
-            <a:off x="457200" y="6035040"/>
-            <a:ext cx="11247120" cy="502920"/>
-          </a:xfrm>
-          <a:prstGeom prst="rect">
-            <a:avLst/>
-          </a:prstGeom>
-          <a:noFill/>
-        </p:spPr>
-        <p:txBody>
-          <a:bodyPr wrap="square">
-            <a:spAutoFit/>
-          </a:bodyPr>
-          <a:lstStyle/>
-          <a:p>
-            <a:pPr algn="l"/>
-            <a:r>
-              <a:rPr sz="1300" b="0">
-                <a:solidFill>
-                  <a:srgbClr val="00C2CB"/>
-                </a:solidFill>
-              </a:rPr>
-              <a:t>Você aprende a projetar especialização com métricas, avaliação e governança.</a:t>
+              <a:t>•  Módulo 5: Fine-Tuning em Produção — ops, riscos (catastrophic forgetting), compliance e governança</a:t>
             </a:r>
           </a:p>
         </p:txBody>
@@ -6696,7 +6275,7 @@
                   <a:srgbClr val="00C2CB"/>
                 </a:solidFill>
               </a:rPr>
-              <a:t>Fechamento: do conceito ao sistema operável</a:t>
+              <a:t>Próximos passos</a:t>
             </a:r>
           </a:p>
         </p:txBody>
@@ -6730,7 +6309,7 @@
                   <a:srgbClr val="FFFFFF"/>
                 </a:solidFill>
               </a:rPr>
-              <a:t>✓  Fundamentos: contratos, APIs e dados (confiabilidade base)</a:t>
+              <a:t>✓  Comece pelo Bloco 1 (Fundamentos) para consolidar base técnica e mentalidade de produção</a:t>
             </a:r>
           </a:p>
         </p:txBody>
@@ -6764,7 +6343,7 @@
                   <a:srgbClr val="FFFFFF"/>
                 </a:solidFill>
               </a:rPr>
-              <a:t>✓  RAG: pipeline completo + avaliação/observabilidade</a:t>
+              <a:t>✓  Em seguida, avance para RAG (Bloco 2) para conectar LLMs a dados reais com avaliação e segurança</a:t>
             </a:r>
           </a:p>
         </p:txBody>
@@ -6798,7 +6377,7 @@
                   <a:srgbClr val="FFFFFF"/>
                 </a:solidFill>
               </a:rPr>
-              <a:t>✓  Agentes: orquestração, memória, ferramentas e guardrails</a:t>
+              <a:t>✓  Depois, passe para Agentes (Bloco 3) para orquestrar decisões e ações com guardrails</a:t>
             </a:r>
           </a:p>
         </p:txBody>
@@ -6832,7 +6411,7 @@
                   <a:srgbClr val="FFFFFF"/>
                 </a:solidFill>
               </a:rPr>
-              <a:t>✓  OCR/Infra: performance, filas, serving e unit economics</a:t>
+              <a:t>✓  Por fim, aprofunde em OCR/Infra (Bloco 4) e especialização (Bloco 5) para casos de maior exigência</a:t>
             </a:r>
           </a:p>
         </p:txBody>
@@ -6840,40 +6419,6 @@
       <p:sp>
         <p:nvSpPr>
           <p:cNvPr id="7" name="TextBox 6"/>
-          <p:cNvSpPr txBox="1"/>
-          <p:nvPr/>
-        </p:nvSpPr>
-        <p:spPr>
-          <a:xfrm>
-            <a:off x="731520" y="3749039"/>
-            <a:ext cx="10515600" cy="502920"/>
-          </a:xfrm>
-          <a:prstGeom prst="rect">
-            <a:avLst/>
-          </a:prstGeom>
-          <a:noFill/>
-        </p:spPr>
-        <p:txBody>
-          <a:bodyPr wrap="square">
-            <a:spAutoFit/>
-          </a:bodyPr>
-          <a:lstStyle/>
-          <a:p>
-            <a:pPr algn="l"/>
-            <a:r>
-              <a:rPr sz="1600" b="0">
-                <a:solidFill>
-                  <a:srgbClr val="FFFFFF"/>
-                </a:solidFill>
-              </a:rPr>
-              <a:t>✓  Fine-tuning: decisão, adaptação eficiente e governança</a:t>
-            </a:r>
-          </a:p>
-        </p:txBody>
-      </p:sp>
-      <p:sp>
-        <p:nvSpPr>
-          <p:cNvPr id="8" name="TextBox 7"/>
           <p:cNvSpPr txBox="1"/>
           <p:nvPr/>
         </p:nvSpPr>
@@ -6900,7 +6445,7 @@
                   <a:srgbClr val="00C2CB"/>
                 </a:solidFill>
               </a:rPr>
-              <a:t>Você termina capaz de projetar e operar sistemas de IA completos.</a:t>
+              <a:t>Você vai sair com autonomia para projetar e colocar em produção soluções de IA úteis, escaláveis e mensuráveis.</a:t>
             </a:r>
           </a:p>
         </p:txBody>
@@ -6960,7 +6505,7 @@
                   <a:srgbClr val="00C2CB"/>
                 </a:solidFill>
               </a:rPr>
-              <a:t>Sobre você (e sobre como pensar como AI Engineer)</a:t>
+              <a:t>Sobre Mim</a:t>
             </a:r>
           </a:p>
         </p:txBody>
@@ -6968,6 +6513,40 @@
       <p:sp>
         <p:nvSpPr>
           <p:cNvPr id="3" name="TextBox 2"/>
+          <p:cNvSpPr txBox="1"/>
+          <p:nvPr/>
+        </p:nvSpPr>
+        <p:spPr>
+          <a:xfrm>
+            <a:off x="457200" y="1097280"/>
+            <a:ext cx="11247120" cy="548640"/>
+          </a:xfrm>
+          <a:prstGeom prst="rect">
+            <a:avLst/>
+          </a:prstGeom>
+          <a:noFill/>
+        </p:spPr>
+        <p:txBody>
+          <a:bodyPr wrap="square">
+            <a:spAutoFit/>
+          </a:bodyPr>
+          <a:lstStyle/>
+          <a:p>
+            <a:pPr algn="l"/>
+            <a:r>
+              <a:rPr sz="1600" b="0">
+                <a:solidFill>
+                  <a:srgbClr val="FFFFFF"/>
+                </a:solidFill>
+              </a:rPr>
+              <a:t>Especialista em Engenharia de Dados e Inteligência Artificial, focado em construir soluções end-to-end que integram pipelines modernos a aplicações avançadas com LLMs, RAG e agentes.</a:t>
+            </a:r>
+          </a:p>
+        </p:txBody>
+      </p:sp>
+      <p:sp>
+        <p:nvSpPr>
+          <p:cNvPr id="4" name="TextBox 3"/>
           <p:cNvSpPr txBox="1"/>
           <p:nvPr/>
         </p:nvSpPr>
@@ -6994,14 +6573,14 @@
                   <a:srgbClr val="FFFFFF"/>
                 </a:solidFill>
               </a:rPr>
-              <a:t>• Você vai construir sistemas de IA que funcionam no mundo real</a:t>
-            </a:r>
-          </a:p>
-        </p:txBody>
-      </p:sp>
-      <p:sp>
-        <p:nvSpPr>
-          <p:cNvPr id="4" name="TextBox 3"/>
+              <a:t>• AI Engineer no TCEMG: desenvolvimento de sistemas full-stack de IA com assistentes virtuais, RAG, agentes e fluxos agenticos para automação e aumento de produtividade no setor público.</a:t>
+            </a:r>
+          </a:p>
+        </p:txBody>
+      </p:sp>
+      <p:sp>
+        <p:nvSpPr>
+          <p:cNvPr id="5" name="TextBox 4"/>
           <p:cNvSpPr txBox="1"/>
           <p:nvPr/>
         </p:nvSpPr>
@@ -7028,14 +6607,14 @@
                   <a:srgbClr val="FFFFFF"/>
                 </a:solidFill>
               </a:rPr>
-              <a:t>• Structured outputs + guardrails para reduzir fragilidade</a:t>
-            </a:r>
-          </a:p>
-        </p:txBody>
-      </p:sp>
-      <p:sp>
-        <p:nvSpPr>
-          <p:cNvPr id="5" name="TextBox 4"/>
+              <a:t>• Implementação de pesquisa inteligente de jurisprudência/leis/normas com consultas semânticas usando LLMs, reduzindo drasticamente tempo de busca e análise.</a:t>
+            </a:r>
+          </a:p>
+        </p:txBody>
+      </p:sp>
+      <p:sp>
+        <p:nvSpPr>
+          <p:cNvPr id="6" name="TextBox 5"/>
           <p:cNvSpPr txBox="1"/>
           <p:nvPr/>
         </p:nvSpPr>
@@ -7062,14 +6641,14 @@
                   <a:srgbClr val="FFFFFF"/>
                 </a:solidFill>
               </a:rPr>
-              <a:t>• RAG com avaliação/observabilidade para manter qualidade contínua</a:t>
-            </a:r>
-          </a:p>
-        </p:txBody>
-      </p:sp>
-      <p:sp>
-        <p:nvSpPr>
-          <p:cNvPr id="6" name="TextBox 5"/>
+              <a:t>• Data Engineer na Quality Engineering: API de catálogo de dados com pipelines escaláveis e criação de arquitetura RAG em Python para onboarding com banco vetorial e embeddings.</a:t>
+            </a:r>
+          </a:p>
+        </p:txBody>
+      </p:sp>
+      <p:sp>
+        <p:nvSpPr>
+          <p:cNvPr id="7" name="TextBox 6"/>
           <p:cNvSpPr txBox="1"/>
           <p:nvPr/>
         </p:nvSpPr>
@@ -7096,14 +6675,14 @@
                   <a:srgbClr val="FFFFFF"/>
                 </a:solidFill>
               </a:rPr>
-              <a:t>• Agentes orquestrados com memória, ferramentas e human-in-the-loop</a:t>
-            </a:r>
-          </a:p>
-        </p:txBody>
-      </p:sp>
-      <p:sp>
-        <p:nvSpPr>
-          <p:cNvPr id="7" name="TextBox 6"/>
+              <a:t>• Monitor Técnico &amp; Instrutor de AI &amp; Data Engineering na Jornada de Dados: ministra workshops/bootcamps e faz mentoria prática em RAG, bancos vetoriais, busca semântica e automação com IA.</a:t>
+            </a:r>
+          </a:p>
+        </p:txBody>
+      </p:sp>
+      <p:sp>
+        <p:nvSpPr>
+          <p:cNvPr id="8" name="TextBox 7"/>
           <p:cNvSpPr txBox="1"/>
           <p:nvPr/>
         </p:nvSpPr>
@@ -7130,7 +6709,7 @@
                   <a:srgbClr val="00C2CB"/>
                 </a:solidFill>
               </a:rPr>
-              <a:t>Eu trago uma mentalidade de engenharia: qualidade, custo e governança.</a:t>
+              <a:t>Eu ensino este curso para ajudar você a projetar e implementar soluções de IA aplicadas ao mundo real — com fundamentos sólidos de engenharia de dados e práticas modernas em LLMs, RAG e agentes. A ideia é que você saia com autonomia para construir sistemas úteis, escaláveis e com foco em valor de negócio.</a:t>
             </a:r>
           </a:p>
         </p:txBody>
@@ -7233,7 +6812,7 @@
                   <a:srgbClr val="00C2CB"/>
                 </a:solidFill>
               </a:rPr>
-              <a:t>Quem é o AI Engineer e o que você vai construir</a:t>
+              <a:t>O que você vai aprender</a:t>
             </a:r>
           </a:p>
         </p:txBody>
@@ -7267,7 +6846,7 @@
                   <a:srgbClr val="FFFFFF"/>
                 </a:solidFill>
               </a:rPr>
-              <a:t>Definir o papel do AI Engineer e explicar como a trilha reduz o hype e foca em produção.</a:t>
+              <a:t>Sair com uma trilha completa e prática para transformar LLMs em produtos de IA úteis, escaláveis e mensuráveis.</a:t>
             </a:r>
           </a:p>
         </p:txBody>
@@ -7301,7 +6880,7 @@
                   <a:srgbClr val="FFFFFF"/>
                 </a:solidFill>
               </a:rPr>
-              <a:t>•  AI Engineer: arquiteta contexto, dados, fluxos e validações para LLMs</a:t>
+              <a:t>•  Projetar, integrar e operar soluções baseadas em Modelos de Fundação (LLMs) com foco em produção</a:t>
             </a:r>
           </a:p>
         </p:txBody>
@@ -7335,7 +6914,7 @@
                   <a:srgbClr val="FFFFFF"/>
                 </a:solidFill>
               </a:rPr>
-              <a:t>•  Transformar probabilístico → determinístico e confiável</a:t>
+              <a:t>•  Aplicar fundamentos de LLMs + contratos estruturados de dados + arquitetura Python para sistemas escaláveis</a:t>
             </a:r>
           </a:p>
         </p:txBody>
@@ -7369,7 +6948,7 @@
                   <a:srgbClr val="FFFFFF"/>
                 </a:solidFill>
               </a:rPr>
-              <a:t>•  Domínios práticos: Python assíncrono, APIs, dados, Vector DB, observabilidade</a:t>
+              <a:t>•  Construir Sistemas RAG: ingestão, embeddings, retrieval (híbrido), avaliação e segurança</a:t>
             </a:r>
           </a:p>
         </p:txBody>
@@ -7403,7 +6982,7 @@
                   <a:srgbClr val="FFFFFF"/>
                 </a:solidFill>
               </a:rPr>
-              <a:t>•  Desafios reais: alucinações, custos, latência e segurança</a:t>
+              <a:t>•  Orquestrar Agentes de IA com tool calling e grafos de estado (LangGraph), incluindo memória e human-in-the-loop</a:t>
             </a:r>
           </a:p>
         </p:txBody>
@@ -7416,28 +6995,62 @@
         </p:nvSpPr>
         <p:spPr>
           <a:xfrm>
-            <a:off x="457200" y="6035040"/>
-            <a:ext cx="11247120" cy="502920"/>
-          </a:xfrm>
-          <a:prstGeom prst="rect">
-            <a:avLst/>
-          </a:prstGeom>
-          <a:noFill/>
-        </p:spPr>
-        <p:txBody>
-          <a:bodyPr wrap="square">
-            <a:spAutoFit/>
-          </a:bodyPr>
-          <a:lstStyle/>
-          <a:p>
-            <a:pPr algn="l"/>
-            <a:r>
-              <a:rPr sz="1300" b="0">
-                <a:solidFill>
-                  <a:srgbClr val="00C2CB"/>
-                </a:solidFill>
-              </a:rPr>
-              <a:t>Você não aprende só a promptar: aprende a operar sistemas de IA.</a:t>
+            <a:off x="640080" y="3886200"/>
+            <a:ext cx="10515600" cy="502920"/>
+          </a:xfrm>
+          <a:prstGeom prst="rect">
+            <a:avLst/>
+          </a:prstGeom>
+          <a:noFill/>
+        </p:spPr>
+        <p:txBody>
+          <a:bodyPr wrap="square">
+            <a:spAutoFit/>
+          </a:bodyPr>
+          <a:lstStyle/>
+          <a:p>
+            <a:pPr algn="l"/>
+            <a:r>
+              <a:rPr sz="1500" b="0">
+                <a:solidFill>
+                  <a:srgbClr val="FFFFFF"/>
+                </a:solidFill>
+              </a:rPr>
+              <a:t>•  Rodar OCR e Document Intelligence com inferência local/produção e otimização de hardware (vLLM/Ollama)</a:t>
+            </a:r>
+          </a:p>
+        </p:txBody>
+      </p:sp>
+      <p:sp>
+        <p:nvSpPr>
+          <p:cNvPr id="10" name="TextBox 9"/>
+          <p:cNvSpPr txBox="1"/>
+          <p:nvPr/>
+        </p:nvSpPr>
+        <p:spPr>
+          <a:xfrm>
+            <a:off x="640080" y="4434840"/>
+            <a:ext cx="10515600" cy="502920"/>
+          </a:xfrm>
+          <a:prstGeom prst="rect">
+            <a:avLst/>
+          </a:prstGeom>
+          <a:noFill/>
+        </p:spPr>
+        <p:txBody>
+          <a:bodyPr wrap="square">
+            <a:spAutoFit/>
+          </a:bodyPr>
+          <a:lstStyle/>
+          <a:p>
+            <a:pPr algn="l"/>
+            <a:r>
+              <a:rPr sz="1500" b="0">
+                <a:solidFill>
+                  <a:srgbClr val="FFFFFF"/>
+                </a:solidFill>
+              </a:rPr>
+              <a:t>•  Decidir quando fine-tuning é necessário, preparar datasets e fazer deploy com governança</a:t>
             </a:r>
           </a:p>
         </p:txBody>
@@ -7540,7 +7153,7 @@
                   <a:srgbClr val="00C2CB"/>
                 </a:solidFill>
               </a:rPr>
-              <a:t>Bloco 1 — Fundamentos: engenharia para sistemas probabilísticos</a:t>
+              <a:t>Bloco 1: Fundamentos da Engenharia de IA</a:t>
             </a:r>
           </a:p>
         </p:txBody>
@@ -7574,7 +7187,7 @@
                   <a:srgbClr val="FFFFFF"/>
                 </a:solidFill>
               </a:rPr>
-              <a:t>Situar o Bloco 1 e mostrar as competências técnicas-base para produção.</a:t>
+              <a:t>Construir a base de engenharia para trabalhar com sistemas probabilísticos (LLMs) de forma robusta, assíncrona e pronta para produção.</a:t>
             </a:r>
           </a:p>
         </p:txBody>
@@ -7608,7 +7221,7 @@
                   <a:srgbClr val="FFFFFF"/>
                 </a:solidFill>
               </a:rPr>
-              <a:t>→  Base técnica para sistemas probabilísticos, assíncronos e orientados a produção</a:t>
+              <a:t>→  Entender o papel do AI Engineer e os pilares do trabalho (LLMs + arquitetura + produção)</a:t>
             </a:r>
           </a:p>
         </p:txBody>
@@ -7642,7 +7255,7 @@
                   <a:srgbClr val="FFFFFF"/>
                 </a:solidFill>
               </a:rPr>
-              <a:t>→  Contratos estruturados para outputs de LLM (Pydantic/JSON Schema)</a:t>
+              <a:t>→  Dominar a “física” dos LLMs (tokens, context window, sampling) e quando usar prompting vs RAG vs fine-tuning</a:t>
             </a:r>
           </a:p>
         </p:txBody>
@@ -7676,7 +7289,7 @@
                   <a:srgbClr val="FFFFFF"/>
                 </a:solidFill>
               </a:rPr>
-              <a:t>→  APIs assíncronas e integração com RAG/Modelos</a:t>
+              <a:t>→  Aplicar Python moderno e padrões de engenharia (Pydantic, AsyncIO, resiliência/tenacity, observabilidade)</a:t>
             </a:r>
           </a:p>
         </p:txBody>
@@ -7710,7 +7323,7 @@
                   <a:srgbClr val="FFFFFF"/>
                 </a:solidFill>
               </a:rPr>
-              <a:t>→  Armazenamento híbrido: SQL + Vector DB</a:t>
+              <a:t>→  Construir APIs assíncronas com FastAPI e contratos de dados rigorosos para saídas estruturadas</a:t>
             </a:r>
           </a:p>
         </p:txBody>
@@ -7718,6 +7331,40 @@
       <p:sp>
         <p:nvSpPr>
           <p:cNvPr id="9" name="TextBox 8"/>
+          <p:cNvSpPr txBox="1"/>
+          <p:nvPr/>
+        </p:nvSpPr>
+        <p:spPr>
+          <a:xfrm>
+            <a:off x="731520" y="4480559"/>
+            <a:ext cx="10515600" cy="457200"/>
+          </a:xfrm>
+          <a:prstGeom prst="rect">
+            <a:avLst/>
+          </a:prstGeom>
+          <a:noFill/>
+        </p:spPr>
+        <p:txBody>
+          <a:bodyPr wrap="square">
+            <a:spAutoFit/>
+          </a:bodyPr>
+          <a:lstStyle/>
+          <a:p>
+            <a:pPr algn="l"/>
+            <a:r>
+              <a:rPr sz="1500" b="0">
+                <a:solidFill>
+                  <a:srgbClr val="FFFFFF"/>
+                </a:solidFill>
+              </a:rPr>
+              <a:t>→  Modelar dados e integrações híbridas (SQL + Vector DB), com métricas e indexação</a:t>
+            </a:r>
+          </a:p>
+        </p:txBody>
+      </p:sp>
+      <p:sp>
+        <p:nvSpPr>
+          <p:cNvPr id="10" name="TextBox 9"/>
           <p:cNvSpPr txBox="1"/>
           <p:nvPr/>
         </p:nvSpPr>
@@ -7744,7 +7391,7 @@
                   <a:srgbClr val="00C2CB"/>
                 </a:solidFill>
               </a:rPr>
-              <a:t>Fundamentos de software robusto com núcleo probabilístico e dependências externas.</a:t>
+              <a:t>Depois que você entende como LLMs funcionam e como engenharia sustenta produção, fica muito mais fácil escolher o caminho certo (prompting, RAG ou fine-tuning) e construir APIs confiáveis.</a:t>
             </a:r>
           </a:p>
         </p:txBody>
@@ -7847,7 +7494,7 @@
                   <a:srgbClr val="00C2CB"/>
                 </a:solidFill>
               </a:rPr>
-              <a:t>Bloco 1 — O que aprender (síntese por competências)</a:t>
+              <a:t>Aulas — Bloco 1</a:t>
             </a:r>
           </a:p>
         </p:txBody>
@@ -7860,8 +7507,8 @@
         </p:nvSpPr>
         <p:spPr>
           <a:xfrm>
-            <a:off x="457200" y="1051560"/>
-            <a:ext cx="11247120" cy="502920"/>
+            <a:off x="640080" y="1188720"/>
+            <a:ext cx="10515600" cy="502920"/>
           </a:xfrm>
           <a:prstGeom prst="rect">
             <a:avLst/>
@@ -7881,7 +7528,7 @@
                   <a:srgbClr val="FFFFFF"/>
                 </a:solidFill>
               </a:rPr>
-              <a:t>Consolidar os principais temas do Bloco 1 em um plano executável.</a:t>
+              <a:t>•  Módulo 01: A Profissão de AI Engineer &amp; Mercado — papel profissional, diferenças e pilares do trabalho</a:t>
             </a:r>
           </a:p>
         </p:txBody>
@@ -7894,7 +7541,7 @@
         </p:nvSpPr>
         <p:spPr>
           <a:xfrm>
-            <a:off x="640080" y="1691640"/>
+            <a:off x="640080" y="1737360"/>
             <a:ext cx="10515600" cy="502920"/>
           </a:xfrm>
           <a:prstGeom prst="rect">
@@ -7915,7 +7562,7 @@
                   <a:srgbClr val="FFFFFF"/>
                 </a:solidFill>
               </a:rPr>
-              <a:t>•  Papel profissional e mindset de produto/sistemas</a:t>
+              <a:t>•  Módulo 02: Fundamentos de LLMs &amp; GenAI — tokens, contexto, prompting e estratégia RAG vs fine-tuning</a:t>
             </a:r>
           </a:p>
         </p:txBody>
@@ -7928,7 +7575,7 @@
         </p:nvSpPr>
         <p:spPr>
           <a:xfrm>
-            <a:off x="640080" y="2240280"/>
+            <a:off x="640080" y="2286000"/>
             <a:ext cx="10515600" cy="502920"/>
           </a:xfrm>
           <a:prstGeom prst="rect">
@@ -7949,7 +7596,7 @@
                   <a:srgbClr val="FFFFFF"/>
                 </a:solidFill>
               </a:rPr>
-              <a:t>•  Física dos LLMs + estratégias (quando RAG vs fine-tuning)</a:t>
+              <a:t>•  Módulo 03: Python Moderno para AI Engineers — stack, bibliotecas core e observabilidade</a:t>
             </a:r>
           </a:p>
         </p:txBody>
@@ -7962,7 +7609,7 @@
         </p:nvSpPr>
         <p:spPr>
           <a:xfrm>
-            <a:off x="640080" y="2788920"/>
+            <a:off x="640080" y="2834640"/>
             <a:ext cx="10515600" cy="502920"/>
           </a:xfrm>
           <a:prstGeom prst="rect">
@@ -7983,7 +7630,7 @@
                   <a:srgbClr val="FFFFFF"/>
                 </a:solidFill>
               </a:rPr>
-              <a:t>•  Python moderno: tipagem, AsyncIO, resiliência (retries)</a:t>
+              <a:t>•  Módulo 04: APIs &amp; Backend com FastAPI — APIs assíncronas, validação e integração segura</a:t>
             </a:r>
           </a:p>
         </p:txBody>
@@ -7996,7 +7643,7 @@
         </p:nvSpPr>
         <p:spPr>
           <a:xfrm>
-            <a:off x="640080" y="3337560"/>
+            <a:off x="640080" y="3383280"/>
             <a:ext cx="10515600" cy="502920"/>
           </a:xfrm>
           <a:prstGeom prst="rect">
@@ -8017,7 +7664,7 @@
                   <a:srgbClr val="FFFFFF"/>
                 </a:solidFill>
               </a:rPr>
-              <a:t>•  FastAPI: contratos, validação e OpenAPI</a:t>
+              <a:t>•  Módulo 05: Modelagem e Contratos de Dados (Pydantic V2) — schemas, validação e pipeline com retries</a:t>
             </a:r>
           </a:p>
         </p:txBody>
@@ -8030,7 +7677,7 @@
         </p:nvSpPr>
         <p:spPr>
           <a:xfrm>
-            <a:off x="640080" y="3886200"/>
+            <a:off x="640080" y="3931920"/>
             <a:ext cx="10515600" cy="502920"/>
           </a:xfrm>
           <a:prstGeom prst="rect">
@@ -8051,75 +7698,7 @@
                   <a:srgbClr val="FFFFFF"/>
                 </a:solidFill>
               </a:rPr>
-              <a:t>•  Modelagem e contratos de dados: schemas, validadores e parsing com retries</a:t>
-            </a:r>
-          </a:p>
-        </p:txBody>
-      </p:sp>
-      <p:sp>
-        <p:nvSpPr>
-          <p:cNvPr id="10" name="TextBox 9"/>
-          <p:cNvSpPr txBox="1"/>
-          <p:nvPr/>
-        </p:nvSpPr>
-        <p:spPr>
-          <a:xfrm>
-            <a:off x="640080" y="4434840"/>
-            <a:ext cx="10515600" cy="502920"/>
-          </a:xfrm>
-          <a:prstGeom prst="rect">
-            <a:avLst/>
-          </a:prstGeom>
-          <a:noFill/>
-        </p:spPr>
-        <p:txBody>
-          <a:bodyPr wrap="square">
-            <a:spAutoFit/>
-          </a:bodyPr>
-          <a:lstStyle/>
-          <a:p>
-            <a:pPr algn="l"/>
-            <a:r>
-              <a:rPr sz="1500" b="0">
-                <a:solidFill>
-                  <a:srgbClr val="FFFFFF"/>
-                </a:solidFill>
-              </a:rPr>
-              <a:t>•  Databases: embeddings, métricas (cosseno/dot) e arquitetura híbrida SQL+Vetorial</a:t>
-            </a:r>
-          </a:p>
-        </p:txBody>
-      </p:sp>
-      <p:sp>
-        <p:nvSpPr>
-          <p:cNvPr id="11" name="TextBox 10"/>
-          <p:cNvSpPr txBox="1"/>
-          <p:nvPr/>
-        </p:nvSpPr>
-        <p:spPr>
-          <a:xfrm>
-            <a:off x="457200" y="6035040"/>
-            <a:ext cx="11247120" cy="502920"/>
-          </a:xfrm>
-          <a:prstGeom prst="rect">
-            <a:avLst/>
-          </a:prstGeom>
-          <a:noFill/>
-        </p:spPr>
-        <p:txBody>
-          <a:bodyPr wrap="square">
-            <a:spAutoFit/>
-          </a:bodyPr>
-          <a:lstStyle/>
-          <a:p>
-            <a:pPr algn="l"/>
-            <a:r>
-              <a:rPr sz="1300" b="0">
-                <a:solidFill>
-                  <a:srgbClr val="00C2CB"/>
-                </a:solidFill>
-              </a:rPr>
-              <a:t>Você cria a “infra de confiabilidade” para sustentar LLMs em produção.</a:t>
+              <a:t>•  Módulo 06: Bancos de Dados (SQL + Vetorial) — embeddings, busca semântica, Qdrant e arquitetura híbrida</a:t>
             </a:r>
           </a:p>
         </p:txBody>
@@ -8222,7 +7801,7 @@
                   <a:srgbClr val="00C2CB"/>
                 </a:solidFill>
               </a:rPr>
-              <a:t>Bloco 2 — RAG: conectar LLMs a dados privados</a:t>
+              <a:t>Bloco 2: Sistemas RAG</a:t>
             </a:r>
           </a:p>
         </p:txBody>
@@ -8256,7 +7835,7 @@
                   <a:srgbClr val="FFFFFF"/>
                 </a:solidFill>
               </a:rPr>
-              <a:t>Definir RAG e preparar o aluno para ingestion, retrieval, avaliação e deploy.</a:t>
+              <a:t>Conectar LLMs a dados privados com pipelines de ingestão, retrieval eficiente, avaliação contínua e deploy seguro.</a:t>
             </a:r>
           </a:p>
         </p:txBody>
@@ -8290,7 +7869,7 @@
                   <a:srgbClr val="FFFFFF"/>
                 </a:solidFill>
               </a:rPr>
-              <a:t>→  Objetivo: conectar LLMs aos seus dados privados</a:t>
+              <a:t>→  Aprender o modelo mental de RAG (Ingestion → Store → Retrieve → Generate)</a:t>
             </a:r>
           </a:p>
         </p:txBody>
@@ -8324,7 +7903,7 @@
                   <a:srgbClr val="FFFFFF"/>
                 </a:solidFill>
               </a:rPr>
-              <a:t>→  Arquitetura mais comum em produção</a:t>
+              <a:t>→  Construir pipelines de ingestão com chunking e metadados que elevam a qualidade do retrieval</a:t>
             </a:r>
           </a:p>
         </p:txBody>
@@ -8358,7 +7937,7 @@
                   <a:srgbClr val="FFFFFF"/>
                 </a:solidFill>
               </a:rPr>
-              <a:t>→  Pipeline: Ingestão → Store → Retrieve → Generate</a:t>
+              <a:t>→  Escolher embeddings e indexar em Vector DBs com entendimento de tradeoffs</a:t>
             </a:r>
           </a:p>
         </p:txBody>
@@ -8392,7 +7971,7 @@
                   <a:srgbClr val="FFFFFF"/>
                 </a:solidFill>
               </a:rPr>
-              <a:t>→  Avaliação e observabilidade como parte do sistema</a:t>
+              <a:t>→  Implementar estratégias de retrieval (hybrid, reranking, query expansion)</a:t>
             </a:r>
           </a:p>
         </p:txBody>
@@ -8400,6 +7979,40 @@
       <p:sp>
         <p:nvSpPr>
           <p:cNvPr id="9" name="TextBox 8"/>
+          <p:cNvSpPr txBox="1"/>
+          <p:nvPr/>
+        </p:nvSpPr>
+        <p:spPr>
+          <a:xfrm>
+            <a:off x="731520" y="4480559"/>
+            <a:ext cx="10515600" cy="457200"/>
+          </a:xfrm>
+          <a:prstGeom prst="rect">
+            <a:avLst/>
+          </a:prstGeom>
+          <a:noFill/>
+        </p:spPr>
+        <p:txBody>
+          <a:bodyPr wrap="square">
+            <a:spAutoFit/>
+          </a:bodyPr>
+          <a:lstStyle/>
+          <a:p>
+            <a:pPr algn="l"/>
+            <a:r>
+              <a:rPr sz="1500" b="0">
+                <a:solidFill>
+                  <a:srgbClr val="FFFFFF"/>
+                </a:solidFill>
+              </a:rPr>
+              <a:t>→  Adicionar avaliação/observabilidade e preparar RAG para produção (segurança e custos)</a:t>
+            </a:r>
+          </a:p>
+        </p:txBody>
+      </p:sp>
+      <p:sp>
+        <p:nvSpPr>
+          <p:cNvPr id="10" name="TextBox 9"/>
           <p:cNvSpPr txBox="1"/>
           <p:nvPr/>
         </p:nvSpPr>
@@ -8426,7 +8039,7 @@
                   <a:srgbClr val="00C2CB"/>
                 </a:solidFill>
               </a:rPr>
-              <a:t>RAG é um sistema: dados, busca, geração e validação contínuas.</a:t>
+              <a:t>Agora que você já domina a base de engenharia do Bloco 1, o RAG vira a ponte para dar respostas ancoradas em dados reais — com performance e controle.</a:t>
             </a:r>
           </a:p>
         </p:txBody>
@@ -8529,7 +8142,7 @@
                   <a:srgbClr val="00C2CB"/>
                 </a:solidFill>
               </a:rPr>
-              <a:t>Bloco 2 — O que aprender (síntese por pipeline)</a:t>
+              <a:t>Aulas — Bloco 2</a:t>
             </a:r>
           </a:p>
         </p:txBody>
@@ -8542,8 +8155,8 @@
         </p:nvSpPr>
         <p:spPr>
           <a:xfrm>
-            <a:off x="457200" y="1051560"/>
-            <a:ext cx="11247120" cy="502920"/>
+            <a:off x="640080" y="1188720"/>
+            <a:ext cx="10515600" cy="502920"/>
           </a:xfrm>
           <a:prstGeom prst="rect">
             <a:avLst/>
@@ -8563,7 +8176,7 @@
                   <a:srgbClr val="FFFFFF"/>
                 </a:solidFill>
               </a:rPr>
-              <a:t>Resumir os componentes técnicos do Bloco 2 em categorias de arquitetura.</a:t>
+              <a:t>•  Módulo 1: Fundamentos de RAG e Modelos Mentais — definição, por que RAG e arquitetura padrão</a:t>
             </a:r>
           </a:p>
         </p:txBody>
@@ -8576,7 +8189,7 @@
         </p:nvSpPr>
         <p:spPr>
           <a:xfrm>
-            <a:off x="640080" y="1691640"/>
+            <a:off x="640080" y="1737360"/>
             <a:ext cx="10515600" cy="502920"/>
           </a:xfrm>
           <a:prstGeom prst="rect">
@@ -8597,7 +8210,7 @@
                   <a:srgbClr val="FFFFFF"/>
                 </a:solidFill>
               </a:rPr>
-              <a:t>•  Ingestão/ETL e chunking (fixed/recursive/semantic) + metadados</a:t>
+              <a:t>•  Módulo 2: Ingestão de Dados e Pipelines — ETL para IA, chunking e metadados</a:t>
             </a:r>
           </a:p>
         </p:txBody>
@@ -8610,7 +8223,7 @@
         </p:nvSpPr>
         <p:spPr>
           <a:xfrm>
-            <a:off x="640080" y="2240280"/>
+            <a:off x="640080" y="2286000"/>
             <a:ext cx="10515600" cy="502920"/>
           </a:xfrm>
           <a:prstGeom prst="rect">
@@ -8631,7 +8244,7 @@
                   <a:srgbClr val="FFFFFF"/>
                 </a:solidFill>
               </a:rPr>
-              <a:t>•  Embeddings (modelos OpenAI vs open-source) e suporte a multimodalidade linguística</a:t>
+              <a:t>•  Módulo 3: Embeddings (Visão Moderna) — conceitos, modelos e lidar com multi-idioma</a:t>
             </a:r>
           </a:p>
         </p:txBody>
@@ -8644,7 +8257,7 @@
         </p:nvSpPr>
         <p:spPr>
           <a:xfrm>
-            <a:off x="640080" y="2788920"/>
+            <a:off x="640080" y="2834640"/>
             <a:ext cx="10515600" cy="502920"/>
           </a:xfrm>
           <a:prstGeom prst="rect">
@@ -8665,7 +8278,7 @@
                   <a:srgbClr val="FFFFFF"/>
                 </a:solidFill>
               </a:rPr>
-              <a:t>•  Vector DBs (Qdrant/pgvector) e indexação (HNSW) com tradeoffs</a:t>
+              <a:t>•  Módulo 4: Vetor Databases (Vector DBs) — Qdrant/pgvector, HNSW e tradeoffs</a:t>
             </a:r>
           </a:p>
         </p:txBody>
@@ -8678,7 +8291,7 @@
         </p:nvSpPr>
         <p:spPr>
           <a:xfrm>
-            <a:off x="640080" y="3337560"/>
+            <a:off x="640080" y="3383280"/>
             <a:ext cx="10515600" cy="502920"/>
           </a:xfrm>
           <a:prstGeom prst="rect">
@@ -8699,7 +8312,7 @@
                   <a:srgbClr val="FFFFFF"/>
                 </a:solidFill>
               </a:rPr>
-              <a:t>•  Retrieval: hybrid search, reranking e query expansion</a:t>
+              <a:t>•  Módulo 5: Estratégias de Retrieval (Crítico) — hybrid search, reranking e query expansion</a:t>
             </a:r>
           </a:p>
         </p:txBody>
@@ -8712,7 +8325,7 @@
         </p:nvSpPr>
         <p:spPr>
           <a:xfrm>
-            <a:off x="640080" y="3886200"/>
+            <a:off x="640080" y="3931920"/>
             <a:ext cx="10515600" cy="502920"/>
           </a:xfrm>
           <a:prstGeom prst="rect">
@@ -8733,7 +8346,7 @@
                   <a:srgbClr val="FFFFFF"/>
                 </a:solidFill>
               </a:rPr>
-              <a:t>•  RAG Agents e Graph RAG: busca orientada a ferramentas e conhecimento estruturado</a:t>
+              <a:t>•  Módulo 6: RAG Agents — LangChain vs LlamaIndex e tool use para busca sob demanda</a:t>
             </a:r>
           </a:p>
         </p:txBody>
@@ -8746,7 +8359,7 @@
         </p:nvSpPr>
         <p:spPr>
           <a:xfrm>
-            <a:off x="640080" y="4434840"/>
+            <a:off x="640080" y="4480559"/>
             <a:ext cx="10515600" cy="502920"/>
           </a:xfrm>
           <a:prstGeom prst="rect">
@@ -8767,7 +8380,7 @@
                   <a:srgbClr val="FFFFFF"/>
                 </a:solidFill>
               </a:rPr>
-              <a:t>•  Avaliação (RAGAS/faithfulness) + tracing + produção (segurança/custos)</a:t>
+              <a:t>•  Módulo 7: Graph RAG — knowledge graphs e Graph RAG do zero</a:t>
             </a:r>
           </a:p>
         </p:txBody>
@@ -8780,28 +8393,62 @@
         </p:nvSpPr>
         <p:spPr>
           <a:xfrm>
-            <a:off x="457200" y="6035040"/>
-            <a:ext cx="11247120" cy="502920"/>
-          </a:xfrm>
-          <a:prstGeom prst="rect">
-            <a:avLst/>
-          </a:prstGeom>
-          <a:noFill/>
-        </p:spPr>
-        <p:txBody>
-          <a:bodyPr wrap="square">
-            <a:spAutoFit/>
-          </a:bodyPr>
-          <a:lstStyle/>
-          <a:p>
-            <a:pPr algn="l"/>
-            <a:r>
-              <a:rPr sz="1300" b="0">
-                <a:solidFill>
-                  <a:srgbClr val="00C2CB"/>
-                </a:solidFill>
-              </a:rPr>
-              <a:t>Você aprende a operar qualidade de resposta com avaliação e monitoramento.</a:t>
+            <a:off x="640080" y="5029199"/>
+            <a:ext cx="10515600" cy="502920"/>
+          </a:xfrm>
+          <a:prstGeom prst="rect">
+            <a:avLst/>
+          </a:prstGeom>
+          <a:noFill/>
+        </p:spPr>
+        <p:txBody>
+          <a:bodyPr wrap="square">
+            <a:spAutoFit/>
+          </a:bodyPr>
+          <a:lstStyle/>
+          <a:p>
+            <a:pPr algn="l"/>
+            <a:r>
+              <a:rPr sz="1500" b="0">
+                <a:solidFill>
+                  <a:srgbClr val="FFFFFF"/>
+                </a:solidFill>
+              </a:rPr>
+              <a:t>•  Módulo 8: Avaliação e Observabilidade — Ragas, tracing e golden datasets</a:t>
+            </a:r>
+          </a:p>
+        </p:txBody>
+      </p:sp>
+      <p:sp>
+        <p:nvSpPr>
+          <p:cNvPr id="12" name="TextBox 11"/>
+          <p:cNvSpPr txBox="1"/>
+          <p:nvPr/>
+        </p:nvSpPr>
+        <p:spPr>
+          <a:xfrm>
+            <a:off x="640080" y="5577839"/>
+            <a:ext cx="10515600" cy="502920"/>
+          </a:xfrm>
+          <a:prstGeom prst="rect">
+            <a:avLst/>
+          </a:prstGeom>
+          <a:noFill/>
+        </p:spPr>
+        <p:txBody>
+          <a:bodyPr wrap="square">
+            <a:spAutoFit/>
+          </a:bodyPr>
+          <a:lstStyle/>
+          <a:p>
+            <a:pPr algn="l"/>
+            <a:r>
+              <a:rPr sz="1500" b="0">
+                <a:solidFill>
+                  <a:srgbClr val="FFFFFF"/>
+                </a:solidFill>
+              </a:rPr>
+              <a:t>•  Módulo 09: RAG em Produção — otimização, segurança (prompt injection) e custos</a:t>
             </a:r>
           </a:p>
         </p:txBody>
@@ -8904,7 +8551,7 @@
                   <a:srgbClr val="00C2CB"/>
                 </a:solidFill>
               </a:rPr>
-              <a:t>Bloco 3 — Agentes de IA: raciocinar, decidir e agir</a:t>
+              <a:t>Bloco 3: Sistemas de Agentes de IA</a:t>
             </a:r>
           </a:p>
         </p:txBody>
@@ -8938,7 +8585,7 @@
                   <a:srgbClr val="FFFFFF"/>
                 </a:solidFill>
               </a:rPr>
-              <a:t>Introduzir o conceito de agente e orientar para orquestração e segurança em produção.</a:t>
+              <a:t>Projetar, orquestrar e operar agentes confiáveis, com tool calling estruturado, memória e guardrails para produção.</a:t>
             </a:r>
           </a:p>
         </p:txBody>
@@ -8972,7 +8619,7 @@
                   <a:srgbClr val="FFFFFF"/>
                 </a:solidFill>
               </a:rPr>
-              <a:t>→  Agentes têm autonomia controlada</a:t>
+              <a:t>→  Entender a diferença real entre workflow e agente (loop de raciocínio)</a:t>
             </a:r>
           </a:p>
         </p:txBody>
@@ -9006,7 +8653,7 @@
                   <a:srgbClr val="FFFFFF"/>
                 </a:solidFill>
               </a:rPr>
-              <a:t>→  Fronteira da Engenharia de IA (2026)</a:t>
+              <a:t>→  Aplicar arquiteturas modernas (ReAct, Plan-and-Solve, Reflection) e pensar em spectrum de complexidade</a:t>
             </a:r>
           </a:p>
         </p:txBody>
@@ -9040,7 +8687,7 @@
                   <a:srgbClr val="FFFFFF"/>
                 </a:solidFill>
               </a:rPr>
-              <a:t>→  Ferramentas + state machines (grafos) + guardrails</a:t>
+              <a:t>→  Construir agentes com tool calling e structured outputs validados</a:t>
             </a:r>
           </a:p>
         </p:txBody>
@@ -9074,7 +8721,7 @@
                   <a:srgbClr val="FFFFFF"/>
                 </a:solidFill>
               </a:rPr>
-              <a:t>→  Observabilidade e human-in-the-loop</a:t>
+              <a:t>→  Orquestrar com LangGraph usando grafos de estado, loops e persistência</a:t>
             </a:r>
           </a:p>
         </p:txBody>
@@ -9082,6 +8729,40 @@
       <p:sp>
         <p:nvSpPr>
           <p:cNvPr id="9" name="TextBox 8"/>
+          <p:cNvSpPr txBox="1"/>
+          <p:nvPr/>
+        </p:nvSpPr>
+        <p:spPr>
+          <a:xfrm>
+            <a:off x="731520" y="4480559"/>
+            <a:ext cx="10515600" cy="457200"/>
+          </a:xfrm>
+          <a:prstGeom prst="rect">
+            <a:avLst/>
+          </a:prstGeom>
+          <a:noFill/>
+        </p:spPr>
+        <p:txBody>
+          <a:bodyPr wrap="square">
+            <a:spAutoFit/>
+          </a:bodyPr>
+          <a:lstStyle/>
+          <a:p>
+            <a:pPr algn="l"/>
+            <a:r>
+              <a:rPr sz="1500" b="0">
+                <a:solidFill>
+                  <a:srgbClr val="FFFFFF"/>
+                </a:solidFill>
+              </a:rPr>
+              <a:t>→  Implementar memória, multi-agents, human-in-the-loop e preparar para deploy e monitoramento</a:t>
+            </a:r>
+          </a:p>
+        </p:txBody>
+      </p:sp>
+      <p:sp>
+        <p:nvSpPr>
+          <p:cNvPr id="10" name="TextBox 9"/>
           <p:cNvSpPr txBox="1"/>
           <p:nvPr/>
         </p:nvSpPr>
@@ -9108,7 +8789,7 @@
                   <a:srgbClr val="00C2CB"/>
                 </a:solidFill>
               </a:rPr>
-              <a:t>Agentes são sistemas: fluxo, memória, ferramentas, aprovações e métricas.</a:t>
+              <a:t>Com RAG funcionando em produção, chega a hora de ir além da “resposta” e orquestrar ações — agentes que consultam, decidem e executam com segurança.</a:t>
             </a:r>
           </a:p>
         </p:txBody>
@@ -9211,7 +8892,7 @@
                   <a:srgbClr val="00C2CB"/>
                 </a:solidFill>
               </a:rPr>
-              <a:t>Bloco 3 — O que aprender (síntese por design)</a:t>
+              <a:t>Aulas — Bloco 3</a:t>
             </a:r>
           </a:p>
         </p:txBody>
@@ -9224,8 +8905,8 @@
         </p:nvSpPr>
         <p:spPr>
           <a:xfrm>
-            <a:off x="457200" y="1051560"/>
-            <a:ext cx="11247120" cy="502920"/>
+            <a:off x="640080" y="1188720"/>
+            <a:ext cx="10515600" cy="502920"/>
           </a:xfrm>
           <a:prstGeom prst="rect">
             <a:avLst/>
@@ -9245,7 +8926,7 @@
                   <a:srgbClr val="FFFFFF"/>
                 </a:solidFill>
               </a:rPr>
-              <a:t>Organizar as competências do Bloco 3 em uma visão de arquitetura de agentes.</a:t>
+              <a:t>•  Módulo 1: Fundamentos de Agentes e Arquiteturas — workflow vs agente e padrões de arquitetura</a:t>
             </a:r>
           </a:p>
         </p:txBody>
@@ -9258,7 +8939,7 @@
         </p:nvSpPr>
         <p:spPr>
           <a:xfrm>
-            <a:off x="640080" y="1691640"/>
+            <a:off x="640080" y="1737360"/>
             <a:ext cx="10515600" cy="502920"/>
           </a:xfrm>
           <a:prstGeom prst="rect">
@@ -9279,7 +8960,7 @@
                   <a:srgbClr val="FFFFFF"/>
                 </a:solidFill>
               </a:rPr>
-              <a:t>•  Workflow vs agente (loop de raciocínio) + padrões (ReAct/Plan-Solve/Reflection)</a:t>
+              <a:t>•  Módulo 2: Criando seu primeiro Agente — tool calling com schemas e structured output</a:t>
             </a:r>
           </a:p>
         </p:txBody>
@@ -9292,7 +8973,7 @@
         </p:nvSpPr>
         <p:spPr>
           <a:xfrm>
-            <a:off x="640080" y="2240280"/>
+            <a:off x="640080" y="2286000"/>
             <a:ext cx="10515600" cy="502920"/>
           </a:xfrm>
           <a:prstGeom prst="rect">
@@ -9313,7 +8994,7 @@
                   <a:srgbClr val="FFFFFF"/>
                 </a:solidFill>
               </a:rPr>
-              <a:t>•  Tool calling com schemas e structured outputs</a:t>
+              <a:t>•  Módulo 3: LangGraph e Orquestração — state machines, controle de fluxo e recuperação de erros</a:t>
             </a:r>
           </a:p>
         </p:txBody>
@@ -9326,7 +9007,7 @@
         </p:nvSpPr>
         <p:spPr>
           <a:xfrm>
-            <a:off x="640080" y="2788920"/>
+            <a:off x="640080" y="2834640"/>
             <a:ext cx="10515600" cy="502920"/>
           </a:xfrm>
           <a:prstGeom prst="rect">
@@ -9347,7 +9028,7 @@
                   <a:srgbClr val="FFFFFF"/>
                 </a:solidFill>
               </a:rPr>
-              <a:t>•  LangGraph: grafos de estado, loops, retries e persistência</a:t>
+              <a:t>•  Módulo 4: Sistemas de Memória — short-term, long-term e engenharia de memória</a:t>
             </a:r>
           </a:p>
         </p:txBody>
@@ -9360,7 +9041,7 @@
         </p:nvSpPr>
         <p:spPr>
           <a:xfrm>
-            <a:off x="640080" y="3337560"/>
+            <a:off x="640080" y="3383280"/>
             <a:ext cx="10515600" cy="502920"/>
           </a:xfrm>
           <a:prstGeom prst="rect">
@@ -9381,7 +9062,7 @@
                   <a:srgbClr val="FFFFFF"/>
                 </a:solidFill>
               </a:rPr>
-              <a:t>•  Memória: curto vs longo prazo (persistência e Vector DB)</a:t>
+              <a:t>•  Módulo 5: Ferramentas e MCP — integrações com Model Context Protocol</a:t>
             </a:r>
           </a:p>
         </p:txBody>
@@ -9394,7 +9075,7 @@
         </p:nvSpPr>
         <p:spPr>
           <a:xfrm>
-            <a:off x="640080" y="3886200"/>
+            <a:off x="640080" y="3931920"/>
             <a:ext cx="10515600" cy="502920"/>
           </a:xfrm>
           <a:prstGeom prst="rect">
@@ -9415,7 +9096,7 @@
                   <a:srgbClr val="FFFFFF"/>
                 </a:solidFill>
               </a:rPr>
-              <a:t>•  Integrações via MCP e desacoplamento modelo↔ferramenta</a:t>
+              <a:t>•  Módulo 6: Human-in-the-Loop — aprovação, interrupção do grafo e auditoria</a:t>
             </a:r>
           </a:p>
         </p:txBody>
@@ -9428,7 +9109,7 @@
         </p:nvSpPr>
         <p:spPr>
           <a:xfrm>
-            <a:off x="640080" y="4434840"/>
+            <a:off x="640080" y="4480559"/>
             <a:ext cx="10515600" cy="502920"/>
           </a:xfrm>
           <a:prstGeom prst="rect">
@@ -9449,7 +9130,7 @@
                   <a:srgbClr val="FFFFFF"/>
                 </a:solidFill>
               </a:rPr>
-              <a:t>•  Human-in-the-loop: aprovação, interrupção e auditoria</a:t>
+              <a:t>•  Módulo 7: Multi-Agent Systems — padrões de delegação e impacto de custo</a:t>
             </a:r>
           </a:p>
         </p:txBody>
@@ -9462,7 +9143,7 @@
         </p:nvSpPr>
         <p:spPr>
           <a:xfrm>
-            <a:off x="640080" y="4983479"/>
+            <a:off x="640080" y="5029199"/>
             <a:ext cx="10515600" cy="502920"/>
           </a:xfrm>
           <a:prstGeom prst="rect">
@@ -9483,7 +9164,7 @@
                   <a:srgbClr val="FFFFFF"/>
                 </a:solidFill>
               </a:rPr>
-              <a:t>•  Multi-agents: delegação e custo</a:t>
+              <a:t>•  Módulo 8: Deep Agents — riscos, guardrails e avaliação de trajetórias</a:t>
             </a:r>
           </a:p>
         </p:txBody>
@@ -9496,7 +9177,7 @@
         </p:nvSpPr>
         <p:spPr>
           <a:xfrm>
-            <a:off x="640080" y="5532119"/>
+            <a:off x="640080" y="5577839"/>
             <a:ext cx="10515600" cy="502920"/>
           </a:xfrm>
           <a:prstGeom prst="rect">
@@ -9517,75 +9198,7 @@
                   <a:srgbClr val="FFFFFF"/>
                 </a:solidFill>
               </a:rPr>
-              <a:t>•  Guardrails e avaliação de trajetórias</a:t>
-            </a:r>
-          </a:p>
-        </p:txBody>
-      </p:sp>
-      <p:sp>
-        <p:nvSpPr>
-          <p:cNvPr id="13" name="TextBox 12"/>
-          <p:cNvSpPr txBox="1"/>
-          <p:nvPr/>
-        </p:nvSpPr>
-        <p:spPr>
-          <a:xfrm>
-            <a:off x="640080" y="6080759"/>
-            <a:ext cx="10515600" cy="502920"/>
-          </a:xfrm>
-          <a:prstGeom prst="rect">
-            <a:avLst/>
-          </a:prstGeom>
-          <a:noFill/>
-        </p:spPr>
-        <p:txBody>
-          <a:bodyPr wrap="square">
-            <a:spAutoFit/>
-          </a:bodyPr>
-          <a:lstStyle/>
-          <a:p>
-            <a:pPr algn="l"/>
-            <a:r>
-              <a:rPr sz="1500" b="0">
-                <a:solidFill>
-                  <a:srgbClr val="FFFFFF"/>
-                </a:solidFill>
-              </a:rPr>
-              <a:t>•  Produção: versionamento, deploy e monitoramento (tracing/métricas)</a:t>
-            </a:r>
-          </a:p>
-        </p:txBody>
-      </p:sp>
-      <p:sp>
-        <p:nvSpPr>
-          <p:cNvPr id="14" name="TextBox 13"/>
-          <p:cNvSpPr txBox="1"/>
-          <p:nvPr/>
-        </p:nvSpPr>
-        <p:spPr>
-          <a:xfrm>
-            <a:off x="457200" y="6035040"/>
-            <a:ext cx="11247120" cy="502920"/>
-          </a:xfrm>
-          <a:prstGeom prst="rect">
-            <a:avLst/>
-          </a:prstGeom>
-          <a:noFill/>
-        </p:spPr>
-        <p:txBody>
-          <a:bodyPr wrap="square">
-            <a:spAutoFit/>
-          </a:bodyPr>
-          <a:lstStyle/>
-          <a:p>
-            <a:pPr algn="l"/>
-            <a:r>
-              <a:rPr sz="1300" b="0">
-                <a:solidFill>
-                  <a:srgbClr val="00C2CB"/>
-                </a:solidFill>
-              </a:rPr>
-              <a:t>Você controla autonomia e mede eficácia para colocar agentes no mundo real.</a:t>
+              <a:t>•  Módulo 9: Agentes de IA em Produção — observabilidade (Langfuse), deploy/versão e monitoramento</a:t>
             </a:r>
           </a:p>
         </p:txBody>
